--- a/public/videos/repositories/choice-compass/choice-compass-tech-preview.pptx
+++ b/public/videos/repositories/choice-compass/choice-compass-tech-preview.pptx
@@ -134,7 +134,7 @@
           <p:cNvPr id="2" name="タイトル 1">
             <a:extLst>
               <a:ext uri="{FF2B5EF4-FFF2-40B4-BE49-F238E27FC236}">
-                <a16:creationId xmlns:a16="http://schemas.microsoft.com/office/drawing/2014/main" id="{237430FD-7E88-2441-8FE7-881218DED4A8}"/>
+                <a16:creationId xmlns:a16="http://schemas.microsoft.com/office/drawing/2014/main" id="{12527414-9551-2B30-9C9F-512CEDEF391A}"/>
               </a:ext>
             </a:extLst>
           </p:cNvPr>
@@ -171,7 +171,7 @@
           <p:cNvPr id="3" name="字幕 2">
             <a:extLst>
               <a:ext uri="{FF2B5EF4-FFF2-40B4-BE49-F238E27FC236}">
-                <a16:creationId xmlns:a16="http://schemas.microsoft.com/office/drawing/2014/main" id="{E606AF50-8788-E520-A747-F968CC5D2BCD}"/>
+                <a16:creationId xmlns:a16="http://schemas.microsoft.com/office/drawing/2014/main" id="{B57D1025-1435-1901-5674-DC1CAD93F5EA}"/>
               </a:ext>
             </a:extLst>
           </p:cNvPr>
@@ -241,7 +241,7 @@
           <p:cNvPr id="4" name="日付プレースホルダー 3">
             <a:extLst>
               <a:ext uri="{FF2B5EF4-FFF2-40B4-BE49-F238E27FC236}">
-                <a16:creationId xmlns:a16="http://schemas.microsoft.com/office/drawing/2014/main" id="{5BD6B6C5-3CD3-80F2-AD81-EF36A36C46EF}"/>
+                <a16:creationId xmlns:a16="http://schemas.microsoft.com/office/drawing/2014/main" id="{F03FF190-6B46-BCCA-5DD1-F3DA65F9D22D}"/>
               </a:ext>
             </a:extLst>
           </p:cNvPr>
@@ -257,7 +257,7 @@
           <a:bodyPr/>
           <a:lstStyle/>
           <a:p>
-            <a:fld id="{E4B9EACE-8277-4F1E-B563-84ED021220C9}" type="datetimeFigureOut">
+            <a:fld id="{4C7AE7E6-2345-4D03-82D1-2A1E48CB1601}" type="datetimeFigureOut">
               <a:rPr kumimoji="1" lang="ja-JP" altLang="en-US" smtClean="0"/>
               <a:t>2026/7/30</a:t>
             </a:fld>
@@ -270,7 +270,7 @@
           <p:cNvPr id="5" name="フッター プレースホルダー 4">
             <a:extLst>
               <a:ext uri="{FF2B5EF4-FFF2-40B4-BE49-F238E27FC236}">
-                <a16:creationId xmlns:a16="http://schemas.microsoft.com/office/drawing/2014/main" id="{D87639D3-4939-4882-8EF7-387F25E4670C}"/>
+                <a16:creationId xmlns:a16="http://schemas.microsoft.com/office/drawing/2014/main" id="{B86BF779-1D9B-7F35-08D5-0FCD2B1E0CE4}"/>
               </a:ext>
             </a:extLst>
           </p:cNvPr>
@@ -295,7 +295,7 @@
           <p:cNvPr id="6" name="スライド番号プレースホルダー 5">
             <a:extLst>
               <a:ext uri="{FF2B5EF4-FFF2-40B4-BE49-F238E27FC236}">
-                <a16:creationId xmlns:a16="http://schemas.microsoft.com/office/drawing/2014/main" id="{DC613050-603F-A7AC-4422-56581BAB452E}"/>
+                <a16:creationId xmlns:a16="http://schemas.microsoft.com/office/drawing/2014/main" id="{0A7D8B92-D13C-A926-037F-950F186E1EB1}"/>
               </a:ext>
             </a:extLst>
           </p:cNvPr>
@@ -311,7 +311,7 @@
           <a:bodyPr/>
           <a:lstStyle/>
           <a:p>
-            <a:fld id="{6C15E430-0F15-437E-8189-34F82E9AE264}" type="slidenum">
+            <a:fld id="{6FFFD9CB-E791-4D08-B3EF-4C2CC3C433CD}" type="slidenum">
               <a:rPr kumimoji="1" lang="ja-JP" altLang="en-US" smtClean="0"/>
               <a:t>‹#›</a:t>
             </a:fld>
@@ -322,7 +322,7 @@
     </p:spTree>
     <p:extLst>
       <p:ext uri="{BB962C8B-B14F-4D97-AF65-F5344CB8AC3E}">
-        <p14:creationId xmlns:p14="http://schemas.microsoft.com/office/powerpoint/2010/main" val="3239941913"/>
+        <p14:creationId xmlns:p14="http://schemas.microsoft.com/office/powerpoint/2010/main" val="2771231820"/>
       </p:ext>
     </p:extLst>
   </p:cSld>
@@ -354,7 +354,7 @@
           <p:cNvPr id="2" name="タイトル 1">
             <a:extLst>
               <a:ext uri="{FF2B5EF4-FFF2-40B4-BE49-F238E27FC236}">
-                <a16:creationId xmlns:a16="http://schemas.microsoft.com/office/drawing/2014/main" id="{BED15A1C-977B-74A8-7CCA-D5451A7A2594}"/>
+                <a16:creationId xmlns:a16="http://schemas.microsoft.com/office/drawing/2014/main" id="{B31CB482-8DCB-9B8C-74C2-4329091EE529}"/>
               </a:ext>
             </a:extLst>
           </p:cNvPr>
@@ -382,7 +382,7 @@
           <p:cNvPr id="3" name="縦書きテキスト プレースホルダー 2">
             <a:extLst>
               <a:ext uri="{FF2B5EF4-FFF2-40B4-BE49-F238E27FC236}">
-                <a16:creationId xmlns:a16="http://schemas.microsoft.com/office/drawing/2014/main" id="{DF7DFE79-0085-6170-6443-832B6D5EF063}"/>
+                <a16:creationId xmlns:a16="http://schemas.microsoft.com/office/drawing/2014/main" id="{7102C786-6545-6FEC-C4D6-30D52821CDB9}"/>
               </a:ext>
             </a:extLst>
           </p:cNvPr>
@@ -471,7 +471,7 @@
           <p:cNvPr id="4" name="日付プレースホルダー 3">
             <a:extLst>
               <a:ext uri="{FF2B5EF4-FFF2-40B4-BE49-F238E27FC236}">
-                <a16:creationId xmlns:a16="http://schemas.microsoft.com/office/drawing/2014/main" id="{E942E62E-DC87-A610-48EF-5585E86725A9}"/>
+                <a16:creationId xmlns:a16="http://schemas.microsoft.com/office/drawing/2014/main" id="{457CE8AC-B810-A536-CEE2-A912A2BB18FA}"/>
               </a:ext>
             </a:extLst>
           </p:cNvPr>
@@ -487,7 +487,7 @@
           <a:bodyPr/>
           <a:lstStyle/>
           <a:p>
-            <a:fld id="{E4B9EACE-8277-4F1E-B563-84ED021220C9}" type="datetimeFigureOut">
+            <a:fld id="{4C7AE7E6-2345-4D03-82D1-2A1E48CB1601}" type="datetimeFigureOut">
               <a:rPr kumimoji="1" lang="ja-JP" altLang="en-US" smtClean="0"/>
               <a:t>2026/7/30</a:t>
             </a:fld>
@@ -500,7 +500,7 @@
           <p:cNvPr id="5" name="フッター プレースホルダー 4">
             <a:extLst>
               <a:ext uri="{FF2B5EF4-FFF2-40B4-BE49-F238E27FC236}">
-                <a16:creationId xmlns:a16="http://schemas.microsoft.com/office/drawing/2014/main" id="{F812F5BB-5182-3647-2FA6-9B48794FFF78}"/>
+                <a16:creationId xmlns:a16="http://schemas.microsoft.com/office/drawing/2014/main" id="{0F93713B-E617-0528-F9E0-C187662B6B5F}"/>
               </a:ext>
             </a:extLst>
           </p:cNvPr>
@@ -525,7 +525,7 @@
           <p:cNvPr id="6" name="スライド番号プレースホルダー 5">
             <a:extLst>
               <a:ext uri="{FF2B5EF4-FFF2-40B4-BE49-F238E27FC236}">
-                <a16:creationId xmlns:a16="http://schemas.microsoft.com/office/drawing/2014/main" id="{307D7003-10C8-3542-3E8A-F5A09E3CAD08}"/>
+                <a16:creationId xmlns:a16="http://schemas.microsoft.com/office/drawing/2014/main" id="{F3DAA11E-8523-18C9-D478-3D6E701C6B73}"/>
               </a:ext>
             </a:extLst>
           </p:cNvPr>
@@ -541,7 +541,7 @@
           <a:bodyPr/>
           <a:lstStyle/>
           <a:p>
-            <a:fld id="{6C15E430-0F15-437E-8189-34F82E9AE264}" type="slidenum">
+            <a:fld id="{6FFFD9CB-E791-4D08-B3EF-4C2CC3C433CD}" type="slidenum">
               <a:rPr kumimoji="1" lang="ja-JP" altLang="en-US" smtClean="0"/>
               <a:t>‹#›</a:t>
             </a:fld>
@@ -552,7 +552,7 @@
     </p:spTree>
     <p:extLst>
       <p:ext uri="{BB962C8B-B14F-4D97-AF65-F5344CB8AC3E}">
-        <p14:creationId xmlns:p14="http://schemas.microsoft.com/office/powerpoint/2010/main" val="775342971"/>
+        <p14:creationId xmlns:p14="http://schemas.microsoft.com/office/powerpoint/2010/main" val="3038005131"/>
       </p:ext>
     </p:extLst>
   </p:cSld>
@@ -584,7 +584,7 @@
           <p:cNvPr id="2" name="縦書きタイトル 1">
             <a:extLst>
               <a:ext uri="{FF2B5EF4-FFF2-40B4-BE49-F238E27FC236}">
-                <a16:creationId xmlns:a16="http://schemas.microsoft.com/office/drawing/2014/main" id="{1B69DD29-12D5-36A2-1693-EAD6ACCFF3E4}"/>
+                <a16:creationId xmlns:a16="http://schemas.microsoft.com/office/drawing/2014/main" id="{561336EA-10D1-C307-F2A0-F9A2418E94BB}"/>
               </a:ext>
             </a:extLst>
           </p:cNvPr>
@@ -617,7 +617,7 @@
           <p:cNvPr id="3" name="縦書きテキスト プレースホルダー 2">
             <a:extLst>
               <a:ext uri="{FF2B5EF4-FFF2-40B4-BE49-F238E27FC236}">
-                <a16:creationId xmlns:a16="http://schemas.microsoft.com/office/drawing/2014/main" id="{1BC5B721-966E-8AD0-FE80-72C7F2A56B7D}"/>
+                <a16:creationId xmlns:a16="http://schemas.microsoft.com/office/drawing/2014/main" id="{661EF2B8-0A27-5466-7C25-D33BE8EA5A2E}"/>
               </a:ext>
             </a:extLst>
           </p:cNvPr>
@@ -711,7 +711,7 @@
           <p:cNvPr id="4" name="日付プレースホルダー 3">
             <a:extLst>
               <a:ext uri="{FF2B5EF4-FFF2-40B4-BE49-F238E27FC236}">
-                <a16:creationId xmlns:a16="http://schemas.microsoft.com/office/drawing/2014/main" id="{7AA86C98-3F54-9E67-BBE9-8A7838AA1F1D}"/>
+                <a16:creationId xmlns:a16="http://schemas.microsoft.com/office/drawing/2014/main" id="{A2510714-6C5E-4BFC-8DBF-8450BC5B3CB4}"/>
               </a:ext>
             </a:extLst>
           </p:cNvPr>
@@ -727,7 +727,7 @@
           <a:bodyPr/>
           <a:lstStyle/>
           <a:p>
-            <a:fld id="{E4B9EACE-8277-4F1E-B563-84ED021220C9}" type="datetimeFigureOut">
+            <a:fld id="{4C7AE7E6-2345-4D03-82D1-2A1E48CB1601}" type="datetimeFigureOut">
               <a:rPr kumimoji="1" lang="ja-JP" altLang="en-US" smtClean="0"/>
               <a:t>2026/7/30</a:t>
             </a:fld>
@@ -740,7 +740,7 @@
           <p:cNvPr id="5" name="フッター プレースホルダー 4">
             <a:extLst>
               <a:ext uri="{FF2B5EF4-FFF2-40B4-BE49-F238E27FC236}">
-                <a16:creationId xmlns:a16="http://schemas.microsoft.com/office/drawing/2014/main" id="{1D7534EE-8447-8F0D-C58A-9B47C42584BD}"/>
+                <a16:creationId xmlns:a16="http://schemas.microsoft.com/office/drawing/2014/main" id="{CC12B265-20BC-DDF8-3BE0-A523806C0BB9}"/>
               </a:ext>
             </a:extLst>
           </p:cNvPr>
@@ -765,7 +765,7 @@
           <p:cNvPr id="6" name="スライド番号プレースホルダー 5">
             <a:extLst>
               <a:ext uri="{FF2B5EF4-FFF2-40B4-BE49-F238E27FC236}">
-                <a16:creationId xmlns:a16="http://schemas.microsoft.com/office/drawing/2014/main" id="{F06CEE33-7C9A-35AB-DAFB-979F7A32000E}"/>
+                <a16:creationId xmlns:a16="http://schemas.microsoft.com/office/drawing/2014/main" id="{A4D8C851-07F3-E343-426E-C81794B67AE4}"/>
               </a:ext>
             </a:extLst>
           </p:cNvPr>
@@ -781,7 +781,7 @@
           <a:bodyPr/>
           <a:lstStyle/>
           <a:p>
-            <a:fld id="{6C15E430-0F15-437E-8189-34F82E9AE264}" type="slidenum">
+            <a:fld id="{6FFFD9CB-E791-4D08-B3EF-4C2CC3C433CD}" type="slidenum">
               <a:rPr kumimoji="1" lang="ja-JP" altLang="en-US" smtClean="0"/>
               <a:t>‹#›</a:t>
             </a:fld>
@@ -792,7 +792,7 @@
     </p:spTree>
     <p:extLst>
       <p:ext uri="{BB962C8B-B14F-4D97-AF65-F5344CB8AC3E}">
-        <p14:creationId xmlns:p14="http://schemas.microsoft.com/office/powerpoint/2010/main" val="1800547277"/>
+        <p14:creationId xmlns:p14="http://schemas.microsoft.com/office/powerpoint/2010/main" val="856827307"/>
       </p:ext>
     </p:extLst>
   </p:cSld>
@@ -824,7 +824,7 @@
           <p:cNvPr id="2" name="タイトル 1">
             <a:extLst>
               <a:ext uri="{FF2B5EF4-FFF2-40B4-BE49-F238E27FC236}">
-                <a16:creationId xmlns:a16="http://schemas.microsoft.com/office/drawing/2014/main" id="{173F3EAB-2DF0-D22D-B5E2-C4322378AEE2}"/>
+                <a16:creationId xmlns:a16="http://schemas.microsoft.com/office/drawing/2014/main" id="{C6BF2CA3-3D1C-6E54-73F6-0A24D50BC8A5}"/>
               </a:ext>
             </a:extLst>
           </p:cNvPr>
@@ -852,7 +852,7 @@
           <p:cNvPr id="3" name="コンテンツ プレースホルダー 2">
             <a:extLst>
               <a:ext uri="{FF2B5EF4-FFF2-40B4-BE49-F238E27FC236}">
-                <a16:creationId xmlns:a16="http://schemas.microsoft.com/office/drawing/2014/main" id="{5E29044A-B372-93E3-C48F-0B8C4C1C82B6}"/>
+                <a16:creationId xmlns:a16="http://schemas.microsoft.com/office/drawing/2014/main" id="{881B9055-AE09-572B-C5A9-9EC7CA677B9F}"/>
               </a:ext>
             </a:extLst>
           </p:cNvPr>
@@ -941,7 +941,7 @@
           <p:cNvPr id="4" name="日付プレースホルダー 3">
             <a:extLst>
               <a:ext uri="{FF2B5EF4-FFF2-40B4-BE49-F238E27FC236}">
-                <a16:creationId xmlns:a16="http://schemas.microsoft.com/office/drawing/2014/main" id="{F04B12C5-F036-8AAE-0051-30900064BB7E}"/>
+                <a16:creationId xmlns:a16="http://schemas.microsoft.com/office/drawing/2014/main" id="{35D8E560-8348-3825-6423-08B375A07B2D}"/>
               </a:ext>
             </a:extLst>
           </p:cNvPr>
@@ -957,7 +957,7 @@
           <a:bodyPr/>
           <a:lstStyle/>
           <a:p>
-            <a:fld id="{E4B9EACE-8277-4F1E-B563-84ED021220C9}" type="datetimeFigureOut">
+            <a:fld id="{4C7AE7E6-2345-4D03-82D1-2A1E48CB1601}" type="datetimeFigureOut">
               <a:rPr kumimoji="1" lang="ja-JP" altLang="en-US" smtClean="0"/>
               <a:t>2026/7/30</a:t>
             </a:fld>
@@ -970,7 +970,7 @@
           <p:cNvPr id="5" name="フッター プレースホルダー 4">
             <a:extLst>
               <a:ext uri="{FF2B5EF4-FFF2-40B4-BE49-F238E27FC236}">
-                <a16:creationId xmlns:a16="http://schemas.microsoft.com/office/drawing/2014/main" id="{F4F39921-7834-67C1-A23D-2F2BD3A39C33}"/>
+                <a16:creationId xmlns:a16="http://schemas.microsoft.com/office/drawing/2014/main" id="{07D319B4-6057-8E71-B609-9CD5B13A47FF}"/>
               </a:ext>
             </a:extLst>
           </p:cNvPr>
@@ -995,7 +995,7 @@
           <p:cNvPr id="6" name="スライド番号プレースホルダー 5">
             <a:extLst>
               <a:ext uri="{FF2B5EF4-FFF2-40B4-BE49-F238E27FC236}">
-                <a16:creationId xmlns:a16="http://schemas.microsoft.com/office/drawing/2014/main" id="{90B6D790-89D7-4F27-3F34-EB02AA97136C}"/>
+                <a16:creationId xmlns:a16="http://schemas.microsoft.com/office/drawing/2014/main" id="{307901B4-1D9A-3D39-A7C6-12FCFBFBFE63}"/>
               </a:ext>
             </a:extLst>
           </p:cNvPr>
@@ -1011,7 +1011,7 @@
           <a:bodyPr/>
           <a:lstStyle/>
           <a:p>
-            <a:fld id="{6C15E430-0F15-437E-8189-34F82E9AE264}" type="slidenum">
+            <a:fld id="{6FFFD9CB-E791-4D08-B3EF-4C2CC3C433CD}" type="slidenum">
               <a:rPr kumimoji="1" lang="ja-JP" altLang="en-US" smtClean="0"/>
               <a:t>‹#›</a:t>
             </a:fld>
@@ -1022,7 +1022,7 @@
     </p:spTree>
     <p:extLst>
       <p:ext uri="{BB962C8B-B14F-4D97-AF65-F5344CB8AC3E}">
-        <p14:creationId xmlns:p14="http://schemas.microsoft.com/office/powerpoint/2010/main" val="935307758"/>
+        <p14:creationId xmlns:p14="http://schemas.microsoft.com/office/powerpoint/2010/main" val="2784103961"/>
       </p:ext>
     </p:extLst>
   </p:cSld>
@@ -1054,7 +1054,7 @@
           <p:cNvPr id="2" name="タイトル 1">
             <a:extLst>
               <a:ext uri="{FF2B5EF4-FFF2-40B4-BE49-F238E27FC236}">
-                <a16:creationId xmlns:a16="http://schemas.microsoft.com/office/drawing/2014/main" id="{279DCEB8-12E3-23F7-FAB5-75FEF71AC71F}"/>
+                <a16:creationId xmlns:a16="http://schemas.microsoft.com/office/drawing/2014/main" id="{82880B11-EDED-2153-092F-E93F939AD5EB}"/>
               </a:ext>
             </a:extLst>
           </p:cNvPr>
@@ -1091,7 +1091,7 @@
           <p:cNvPr id="3" name="テキスト プレースホルダー 2">
             <a:extLst>
               <a:ext uri="{FF2B5EF4-FFF2-40B4-BE49-F238E27FC236}">
-                <a16:creationId xmlns:a16="http://schemas.microsoft.com/office/drawing/2014/main" id="{BEEE5E39-29DF-E914-9880-248380085323}"/>
+                <a16:creationId xmlns:a16="http://schemas.microsoft.com/office/drawing/2014/main" id="{6B4692AB-A039-542B-3A09-53F3A63AA45C}"/>
               </a:ext>
             </a:extLst>
           </p:cNvPr>
@@ -1216,7 +1216,7 @@
           <p:cNvPr id="4" name="日付プレースホルダー 3">
             <a:extLst>
               <a:ext uri="{FF2B5EF4-FFF2-40B4-BE49-F238E27FC236}">
-                <a16:creationId xmlns:a16="http://schemas.microsoft.com/office/drawing/2014/main" id="{FA1FBC23-7C05-B4B2-13BF-7C743A65E064}"/>
+                <a16:creationId xmlns:a16="http://schemas.microsoft.com/office/drawing/2014/main" id="{49426CCD-01FB-C440-B6AD-C276ADB194A2}"/>
               </a:ext>
             </a:extLst>
           </p:cNvPr>
@@ -1232,7 +1232,7 @@
           <a:bodyPr/>
           <a:lstStyle/>
           <a:p>
-            <a:fld id="{E4B9EACE-8277-4F1E-B563-84ED021220C9}" type="datetimeFigureOut">
+            <a:fld id="{4C7AE7E6-2345-4D03-82D1-2A1E48CB1601}" type="datetimeFigureOut">
               <a:rPr kumimoji="1" lang="ja-JP" altLang="en-US" smtClean="0"/>
               <a:t>2026/7/30</a:t>
             </a:fld>
@@ -1245,7 +1245,7 @@
           <p:cNvPr id="5" name="フッター プレースホルダー 4">
             <a:extLst>
               <a:ext uri="{FF2B5EF4-FFF2-40B4-BE49-F238E27FC236}">
-                <a16:creationId xmlns:a16="http://schemas.microsoft.com/office/drawing/2014/main" id="{8781C5EF-7D4F-D8F4-F140-02C521F4BB17}"/>
+                <a16:creationId xmlns:a16="http://schemas.microsoft.com/office/drawing/2014/main" id="{49D42F89-93E8-D315-07CB-675157FAAEBD}"/>
               </a:ext>
             </a:extLst>
           </p:cNvPr>
@@ -1270,7 +1270,7 @@
           <p:cNvPr id="6" name="スライド番号プレースホルダー 5">
             <a:extLst>
               <a:ext uri="{FF2B5EF4-FFF2-40B4-BE49-F238E27FC236}">
-                <a16:creationId xmlns:a16="http://schemas.microsoft.com/office/drawing/2014/main" id="{8B6E6B6F-478C-5B41-777B-9D872B090C5C}"/>
+                <a16:creationId xmlns:a16="http://schemas.microsoft.com/office/drawing/2014/main" id="{E10CBD8F-5652-A766-DA65-79C5B7480192}"/>
               </a:ext>
             </a:extLst>
           </p:cNvPr>
@@ -1286,7 +1286,7 @@
           <a:bodyPr/>
           <a:lstStyle/>
           <a:p>
-            <a:fld id="{6C15E430-0F15-437E-8189-34F82E9AE264}" type="slidenum">
+            <a:fld id="{6FFFD9CB-E791-4D08-B3EF-4C2CC3C433CD}" type="slidenum">
               <a:rPr kumimoji="1" lang="ja-JP" altLang="en-US" smtClean="0"/>
               <a:t>‹#›</a:t>
             </a:fld>
@@ -1297,7 +1297,7 @@
     </p:spTree>
     <p:extLst>
       <p:ext uri="{BB962C8B-B14F-4D97-AF65-F5344CB8AC3E}">
-        <p14:creationId xmlns:p14="http://schemas.microsoft.com/office/powerpoint/2010/main" val="2062691737"/>
+        <p14:creationId xmlns:p14="http://schemas.microsoft.com/office/powerpoint/2010/main" val="1927766828"/>
       </p:ext>
     </p:extLst>
   </p:cSld>
@@ -1329,7 +1329,7 @@
           <p:cNvPr id="2" name="タイトル 1">
             <a:extLst>
               <a:ext uri="{FF2B5EF4-FFF2-40B4-BE49-F238E27FC236}">
-                <a16:creationId xmlns:a16="http://schemas.microsoft.com/office/drawing/2014/main" id="{1EAD6DE7-A1EF-EA5D-5454-655EC25AB0D4}"/>
+                <a16:creationId xmlns:a16="http://schemas.microsoft.com/office/drawing/2014/main" id="{9AC087F9-FAAF-A640-CCEC-ACE515FDF07B}"/>
               </a:ext>
             </a:extLst>
           </p:cNvPr>
@@ -1357,7 +1357,7 @@
           <p:cNvPr id="3" name="コンテンツ プレースホルダー 2">
             <a:extLst>
               <a:ext uri="{FF2B5EF4-FFF2-40B4-BE49-F238E27FC236}">
-                <a16:creationId xmlns:a16="http://schemas.microsoft.com/office/drawing/2014/main" id="{E94B4392-E370-2384-AEFE-9CF64EEF39FD}"/>
+                <a16:creationId xmlns:a16="http://schemas.microsoft.com/office/drawing/2014/main" id="{4D1CD6BD-37CD-9D52-26B5-6ACDBDA6C5EF}"/>
               </a:ext>
             </a:extLst>
           </p:cNvPr>
@@ -1451,7 +1451,7 @@
           <p:cNvPr id="4" name="コンテンツ プレースホルダー 3">
             <a:extLst>
               <a:ext uri="{FF2B5EF4-FFF2-40B4-BE49-F238E27FC236}">
-                <a16:creationId xmlns:a16="http://schemas.microsoft.com/office/drawing/2014/main" id="{7438AAA6-12A9-57A7-AD1A-A20E7390C12E}"/>
+                <a16:creationId xmlns:a16="http://schemas.microsoft.com/office/drawing/2014/main" id="{6A5AC1C3-DCA8-76CC-D8F4-196F2078DFAC}"/>
               </a:ext>
             </a:extLst>
           </p:cNvPr>
@@ -1545,7 +1545,7 @@
           <p:cNvPr id="5" name="日付プレースホルダー 4">
             <a:extLst>
               <a:ext uri="{FF2B5EF4-FFF2-40B4-BE49-F238E27FC236}">
-                <a16:creationId xmlns:a16="http://schemas.microsoft.com/office/drawing/2014/main" id="{06AC019D-32BD-8C29-4FEE-1E4522F11F78}"/>
+                <a16:creationId xmlns:a16="http://schemas.microsoft.com/office/drawing/2014/main" id="{94C46B4C-FED1-9D32-68CF-C8BA149B8FEC}"/>
               </a:ext>
             </a:extLst>
           </p:cNvPr>
@@ -1561,7 +1561,7 @@
           <a:bodyPr/>
           <a:lstStyle/>
           <a:p>
-            <a:fld id="{E4B9EACE-8277-4F1E-B563-84ED021220C9}" type="datetimeFigureOut">
+            <a:fld id="{4C7AE7E6-2345-4D03-82D1-2A1E48CB1601}" type="datetimeFigureOut">
               <a:rPr kumimoji="1" lang="ja-JP" altLang="en-US" smtClean="0"/>
               <a:t>2026/7/30</a:t>
             </a:fld>
@@ -1574,7 +1574,7 @@
           <p:cNvPr id="6" name="フッター プレースホルダー 5">
             <a:extLst>
               <a:ext uri="{FF2B5EF4-FFF2-40B4-BE49-F238E27FC236}">
-                <a16:creationId xmlns:a16="http://schemas.microsoft.com/office/drawing/2014/main" id="{C1DBD7E8-0AAE-D2DE-FEF7-178437C05F82}"/>
+                <a16:creationId xmlns:a16="http://schemas.microsoft.com/office/drawing/2014/main" id="{76DC158D-1AD4-502A-D263-7BB49D841A8A}"/>
               </a:ext>
             </a:extLst>
           </p:cNvPr>
@@ -1599,7 +1599,7 @@
           <p:cNvPr id="7" name="スライド番号プレースホルダー 6">
             <a:extLst>
               <a:ext uri="{FF2B5EF4-FFF2-40B4-BE49-F238E27FC236}">
-                <a16:creationId xmlns:a16="http://schemas.microsoft.com/office/drawing/2014/main" id="{2D29C3CC-40B6-DF3E-15D3-1A4580549AEB}"/>
+                <a16:creationId xmlns:a16="http://schemas.microsoft.com/office/drawing/2014/main" id="{49BC0F18-39DA-7E0F-F47A-CC6B5CA4D9C6}"/>
               </a:ext>
             </a:extLst>
           </p:cNvPr>
@@ -1615,7 +1615,7 @@
           <a:bodyPr/>
           <a:lstStyle/>
           <a:p>
-            <a:fld id="{6C15E430-0F15-437E-8189-34F82E9AE264}" type="slidenum">
+            <a:fld id="{6FFFD9CB-E791-4D08-B3EF-4C2CC3C433CD}" type="slidenum">
               <a:rPr kumimoji="1" lang="ja-JP" altLang="en-US" smtClean="0"/>
               <a:t>‹#›</a:t>
             </a:fld>
@@ -1626,7 +1626,7 @@
     </p:spTree>
     <p:extLst>
       <p:ext uri="{BB962C8B-B14F-4D97-AF65-F5344CB8AC3E}">
-        <p14:creationId xmlns:p14="http://schemas.microsoft.com/office/powerpoint/2010/main" val="2792681102"/>
+        <p14:creationId xmlns:p14="http://schemas.microsoft.com/office/powerpoint/2010/main" val="2915637149"/>
       </p:ext>
     </p:extLst>
   </p:cSld>
@@ -1658,7 +1658,7 @@
           <p:cNvPr id="2" name="タイトル 1">
             <a:extLst>
               <a:ext uri="{FF2B5EF4-FFF2-40B4-BE49-F238E27FC236}">
-                <a16:creationId xmlns:a16="http://schemas.microsoft.com/office/drawing/2014/main" id="{693B55F3-342A-081F-F2DA-BC84F439E9D4}"/>
+                <a16:creationId xmlns:a16="http://schemas.microsoft.com/office/drawing/2014/main" id="{F7B859F4-AC82-7B56-0167-7CECF45F8D78}"/>
               </a:ext>
             </a:extLst>
           </p:cNvPr>
@@ -1691,7 +1691,7 @@
           <p:cNvPr id="3" name="テキスト プレースホルダー 2">
             <a:extLst>
               <a:ext uri="{FF2B5EF4-FFF2-40B4-BE49-F238E27FC236}">
-                <a16:creationId xmlns:a16="http://schemas.microsoft.com/office/drawing/2014/main" id="{6DF8FF2C-E64D-658C-CA8D-B5E50C1EF96C}"/>
+                <a16:creationId xmlns:a16="http://schemas.microsoft.com/office/drawing/2014/main" id="{61BB5A3F-F201-65B8-B6BB-60255AB065F4}"/>
               </a:ext>
             </a:extLst>
           </p:cNvPr>
@@ -1762,7 +1762,7 @@
           <p:cNvPr id="4" name="コンテンツ プレースホルダー 3">
             <a:extLst>
               <a:ext uri="{FF2B5EF4-FFF2-40B4-BE49-F238E27FC236}">
-                <a16:creationId xmlns:a16="http://schemas.microsoft.com/office/drawing/2014/main" id="{9332F9D3-C269-E658-31CF-741FA582C2D1}"/>
+                <a16:creationId xmlns:a16="http://schemas.microsoft.com/office/drawing/2014/main" id="{2769171A-4CA3-B7EE-B2B8-4C35E5BFA399}"/>
               </a:ext>
             </a:extLst>
           </p:cNvPr>
@@ -1856,7 +1856,7 @@
           <p:cNvPr id="5" name="テキスト プレースホルダー 4">
             <a:extLst>
               <a:ext uri="{FF2B5EF4-FFF2-40B4-BE49-F238E27FC236}">
-                <a16:creationId xmlns:a16="http://schemas.microsoft.com/office/drawing/2014/main" id="{1915CAD8-17E2-9B2F-F74F-18B020C0970A}"/>
+                <a16:creationId xmlns:a16="http://schemas.microsoft.com/office/drawing/2014/main" id="{7F6D2823-0A4A-B0D0-0E0C-56DE5EE1762F}"/>
               </a:ext>
             </a:extLst>
           </p:cNvPr>
@@ -1927,7 +1927,7 @@
           <p:cNvPr id="6" name="コンテンツ プレースホルダー 5">
             <a:extLst>
               <a:ext uri="{FF2B5EF4-FFF2-40B4-BE49-F238E27FC236}">
-                <a16:creationId xmlns:a16="http://schemas.microsoft.com/office/drawing/2014/main" id="{F9A56102-21F5-DED3-5643-655CC6EDF9DB}"/>
+                <a16:creationId xmlns:a16="http://schemas.microsoft.com/office/drawing/2014/main" id="{3370E986-9F5E-B34E-FB86-159AFE13ACC3}"/>
               </a:ext>
             </a:extLst>
           </p:cNvPr>
@@ -2021,7 +2021,7 @@
           <p:cNvPr id="7" name="日付プレースホルダー 6">
             <a:extLst>
               <a:ext uri="{FF2B5EF4-FFF2-40B4-BE49-F238E27FC236}">
-                <a16:creationId xmlns:a16="http://schemas.microsoft.com/office/drawing/2014/main" id="{96827748-1142-5D47-302A-371816673A38}"/>
+                <a16:creationId xmlns:a16="http://schemas.microsoft.com/office/drawing/2014/main" id="{A455EDAC-8773-6B0C-4FBE-7A4CD312DF49}"/>
               </a:ext>
             </a:extLst>
           </p:cNvPr>
@@ -2037,7 +2037,7 @@
           <a:bodyPr/>
           <a:lstStyle/>
           <a:p>
-            <a:fld id="{E4B9EACE-8277-4F1E-B563-84ED021220C9}" type="datetimeFigureOut">
+            <a:fld id="{4C7AE7E6-2345-4D03-82D1-2A1E48CB1601}" type="datetimeFigureOut">
               <a:rPr kumimoji="1" lang="ja-JP" altLang="en-US" smtClean="0"/>
               <a:t>2026/7/30</a:t>
             </a:fld>
@@ -2050,7 +2050,7 @@
           <p:cNvPr id="8" name="フッター プレースホルダー 7">
             <a:extLst>
               <a:ext uri="{FF2B5EF4-FFF2-40B4-BE49-F238E27FC236}">
-                <a16:creationId xmlns:a16="http://schemas.microsoft.com/office/drawing/2014/main" id="{4779B193-C8F2-138C-0993-DF07D8924734}"/>
+                <a16:creationId xmlns:a16="http://schemas.microsoft.com/office/drawing/2014/main" id="{DB4EDA99-13C8-C3CB-3125-C500F2D2A902}"/>
               </a:ext>
             </a:extLst>
           </p:cNvPr>
@@ -2075,7 +2075,7 @@
           <p:cNvPr id="9" name="スライド番号プレースホルダー 8">
             <a:extLst>
               <a:ext uri="{FF2B5EF4-FFF2-40B4-BE49-F238E27FC236}">
-                <a16:creationId xmlns:a16="http://schemas.microsoft.com/office/drawing/2014/main" id="{A304BCAD-2F5C-461A-0A60-7869378619EF}"/>
+                <a16:creationId xmlns:a16="http://schemas.microsoft.com/office/drawing/2014/main" id="{5BD2E17A-CCCC-7A31-6A62-50E5DE16F1F4}"/>
               </a:ext>
             </a:extLst>
           </p:cNvPr>
@@ -2091,7 +2091,7 @@
           <a:bodyPr/>
           <a:lstStyle/>
           <a:p>
-            <a:fld id="{6C15E430-0F15-437E-8189-34F82E9AE264}" type="slidenum">
+            <a:fld id="{6FFFD9CB-E791-4D08-B3EF-4C2CC3C433CD}" type="slidenum">
               <a:rPr kumimoji="1" lang="ja-JP" altLang="en-US" smtClean="0"/>
               <a:t>‹#›</a:t>
             </a:fld>
@@ -2102,7 +2102,7 @@
     </p:spTree>
     <p:extLst>
       <p:ext uri="{BB962C8B-B14F-4D97-AF65-F5344CB8AC3E}">
-        <p14:creationId xmlns:p14="http://schemas.microsoft.com/office/powerpoint/2010/main" val="71271890"/>
+        <p14:creationId xmlns:p14="http://schemas.microsoft.com/office/powerpoint/2010/main" val="357121074"/>
       </p:ext>
     </p:extLst>
   </p:cSld>
@@ -2134,7 +2134,7 @@
           <p:cNvPr id="2" name="タイトル 1">
             <a:extLst>
               <a:ext uri="{FF2B5EF4-FFF2-40B4-BE49-F238E27FC236}">
-                <a16:creationId xmlns:a16="http://schemas.microsoft.com/office/drawing/2014/main" id="{950BB4B6-D2EE-D534-29D7-04D9C01A7472}"/>
+                <a16:creationId xmlns:a16="http://schemas.microsoft.com/office/drawing/2014/main" id="{BFAE0B6F-7B65-A189-9CD5-60A3B28CDCD0}"/>
               </a:ext>
             </a:extLst>
           </p:cNvPr>
@@ -2162,7 +2162,7 @@
           <p:cNvPr id="3" name="日付プレースホルダー 2">
             <a:extLst>
               <a:ext uri="{FF2B5EF4-FFF2-40B4-BE49-F238E27FC236}">
-                <a16:creationId xmlns:a16="http://schemas.microsoft.com/office/drawing/2014/main" id="{4C5FA26E-2C31-2756-CED8-EBEDBACFB388}"/>
+                <a16:creationId xmlns:a16="http://schemas.microsoft.com/office/drawing/2014/main" id="{D6DEC38E-57E6-101C-ADB6-A87FB445BD85}"/>
               </a:ext>
             </a:extLst>
           </p:cNvPr>
@@ -2178,7 +2178,7 @@
           <a:bodyPr/>
           <a:lstStyle/>
           <a:p>
-            <a:fld id="{E4B9EACE-8277-4F1E-B563-84ED021220C9}" type="datetimeFigureOut">
+            <a:fld id="{4C7AE7E6-2345-4D03-82D1-2A1E48CB1601}" type="datetimeFigureOut">
               <a:rPr kumimoji="1" lang="ja-JP" altLang="en-US" smtClean="0"/>
               <a:t>2026/7/30</a:t>
             </a:fld>
@@ -2191,7 +2191,7 @@
           <p:cNvPr id="4" name="フッター プレースホルダー 3">
             <a:extLst>
               <a:ext uri="{FF2B5EF4-FFF2-40B4-BE49-F238E27FC236}">
-                <a16:creationId xmlns:a16="http://schemas.microsoft.com/office/drawing/2014/main" id="{AE4CAE4E-53C8-2735-5404-AD5ABFB6F4C6}"/>
+                <a16:creationId xmlns:a16="http://schemas.microsoft.com/office/drawing/2014/main" id="{18D3F354-DBC1-6DD0-8E15-426B48E5522E}"/>
               </a:ext>
             </a:extLst>
           </p:cNvPr>
@@ -2216,7 +2216,7 @@
           <p:cNvPr id="5" name="スライド番号プレースホルダー 4">
             <a:extLst>
               <a:ext uri="{FF2B5EF4-FFF2-40B4-BE49-F238E27FC236}">
-                <a16:creationId xmlns:a16="http://schemas.microsoft.com/office/drawing/2014/main" id="{95B9ADAE-5782-6E98-86C3-764B82805707}"/>
+                <a16:creationId xmlns:a16="http://schemas.microsoft.com/office/drawing/2014/main" id="{E0B3D5C9-7621-7A8E-91F6-6EE9FCD63B88}"/>
               </a:ext>
             </a:extLst>
           </p:cNvPr>
@@ -2232,7 +2232,7 @@
           <a:bodyPr/>
           <a:lstStyle/>
           <a:p>
-            <a:fld id="{6C15E430-0F15-437E-8189-34F82E9AE264}" type="slidenum">
+            <a:fld id="{6FFFD9CB-E791-4D08-B3EF-4C2CC3C433CD}" type="slidenum">
               <a:rPr kumimoji="1" lang="ja-JP" altLang="en-US" smtClean="0"/>
               <a:t>‹#›</a:t>
             </a:fld>
@@ -2243,7 +2243,7 @@
     </p:spTree>
     <p:extLst>
       <p:ext uri="{BB962C8B-B14F-4D97-AF65-F5344CB8AC3E}">
-        <p14:creationId xmlns:p14="http://schemas.microsoft.com/office/powerpoint/2010/main" val="3219487809"/>
+        <p14:creationId xmlns:p14="http://schemas.microsoft.com/office/powerpoint/2010/main" val="1811469577"/>
       </p:ext>
     </p:extLst>
   </p:cSld>
@@ -2275,7 +2275,7 @@
           <p:cNvPr id="2" name="日付プレースホルダー 1">
             <a:extLst>
               <a:ext uri="{FF2B5EF4-FFF2-40B4-BE49-F238E27FC236}">
-                <a16:creationId xmlns:a16="http://schemas.microsoft.com/office/drawing/2014/main" id="{6FB3DE16-63CD-1DE8-A996-6EAB71C0D772}"/>
+                <a16:creationId xmlns:a16="http://schemas.microsoft.com/office/drawing/2014/main" id="{1E4A6BC3-3DBE-6B40-733C-922F216D39FE}"/>
               </a:ext>
             </a:extLst>
           </p:cNvPr>
@@ -2291,7 +2291,7 @@
           <a:bodyPr/>
           <a:lstStyle/>
           <a:p>
-            <a:fld id="{E4B9EACE-8277-4F1E-B563-84ED021220C9}" type="datetimeFigureOut">
+            <a:fld id="{4C7AE7E6-2345-4D03-82D1-2A1E48CB1601}" type="datetimeFigureOut">
               <a:rPr kumimoji="1" lang="ja-JP" altLang="en-US" smtClean="0"/>
               <a:t>2026/7/30</a:t>
             </a:fld>
@@ -2304,7 +2304,7 @@
           <p:cNvPr id="3" name="フッター プレースホルダー 2">
             <a:extLst>
               <a:ext uri="{FF2B5EF4-FFF2-40B4-BE49-F238E27FC236}">
-                <a16:creationId xmlns:a16="http://schemas.microsoft.com/office/drawing/2014/main" id="{BA0DC3AA-9D62-CFD1-F3CA-BB14BABAB3DF}"/>
+                <a16:creationId xmlns:a16="http://schemas.microsoft.com/office/drawing/2014/main" id="{2329EF70-9DCD-7A26-BB03-37277CB4868D}"/>
               </a:ext>
             </a:extLst>
           </p:cNvPr>
@@ -2329,7 +2329,7 @@
           <p:cNvPr id="4" name="スライド番号プレースホルダー 3">
             <a:extLst>
               <a:ext uri="{FF2B5EF4-FFF2-40B4-BE49-F238E27FC236}">
-                <a16:creationId xmlns:a16="http://schemas.microsoft.com/office/drawing/2014/main" id="{B665E121-ECE2-4281-23FD-F305B25D55A6}"/>
+                <a16:creationId xmlns:a16="http://schemas.microsoft.com/office/drawing/2014/main" id="{E139FB2A-5F39-3CAF-E992-CCED4102F441}"/>
               </a:ext>
             </a:extLst>
           </p:cNvPr>
@@ -2345,7 +2345,7 @@
           <a:bodyPr/>
           <a:lstStyle/>
           <a:p>
-            <a:fld id="{6C15E430-0F15-437E-8189-34F82E9AE264}" type="slidenum">
+            <a:fld id="{6FFFD9CB-E791-4D08-B3EF-4C2CC3C433CD}" type="slidenum">
               <a:rPr kumimoji="1" lang="ja-JP" altLang="en-US" smtClean="0"/>
               <a:t>‹#›</a:t>
             </a:fld>
@@ -2356,7 +2356,7 @@
     </p:spTree>
     <p:extLst>
       <p:ext uri="{BB962C8B-B14F-4D97-AF65-F5344CB8AC3E}">
-        <p14:creationId xmlns:p14="http://schemas.microsoft.com/office/powerpoint/2010/main" val="2313792172"/>
+        <p14:creationId xmlns:p14="http://schemas.microsoft.com/office/powerpoint/2010/main" val="868339681"/>
       </p:ext>
     </p:extLst>
   </p:cSld>
@@ -2388,7 +2388,7 @@
           <p:cNvPr id="2" name="タイトル 1">
             <a:extLst>
               <a:ext uri="{FF2B5EF4-FFF2-40B4-BE49-F238E27FC236}">
-                <a16:creationId xmlns:a16="http://schemas.microsoft.com/office/drawing/2014/main" id="{95FA7851-37C3-7FAA-8443-C616627A3B33}"/>
+                <a16:creationId xmlns:a16="http://schemas.microsoft.com/office/drawing/2014/main" id="{8AC6E1BE-CBFB-F5FF-6BDA-7B105DB0A1A3}"/>
               </a:ext>
             </a:extLst>
           </p:cNvPr>
@@ -2425,7 +2425,7 @@
           <p:cNvPr id="3" name="コンテンツ プレースホルダー 2">
             <a:extLst>
               <a:ext uri="{FF2B5EF4-FFF2-40B4-BE49-F238E27FC236}">
-                <a16:creationId xmlns:a16="http://schemas.microsoft.com/office/drawing/2014/main" id="{D85BDF26-F00A-2CA8-2331-41B6962A2B49}"/>
+                <a16:creationId xmlns:a16="http://schemas.microsoft.com/office/drawing/2014/main" id="{4F325FDA-00B2-AB05-368E-E8CC06B8EFE4}"/>
               </a:ext>
             </a:extLst>
           </p:cNvPr>
@@ -2547,7 +2547,7 @@
           <p:cNvPr id="4" name="テキスト プレースホルダー 3">
             <a:extLst>
               <a:ext uri="{FF2B5EF4-FFF2-40B4-BE49-F238E27FC236}">
-                <a16:creationId xmlns:a16="http://schemas.microsoft.com/office/drawing/2014/main" id="{EB7C28E0-3D44-3826-D75F-AA89AC7E24C7}"/>
+                <a16:creationId xmlns:a16="http://schemas.microsoft.com/office/drawing/2014/main" id="{FCFDEFD3-B1F8-38A6-C981-49CED98B2FD6}"/>
               </a:ext>
             </a:extLst>
           </p:cNvPr>
@@ -2618,7 +2618,7 @@
           <p:cNvPr id="5" name="日付プレースホルダー 4">
             <a:extLst>
               <a:ext uri="{FF2B5EF4-FFF2-40B4-BE49-F238E27FC236}">
-                <a16:creationId xmlns:a16="http://schemas.microsoft.com/office/drawing/2014/main" id="{C3E1D272-B9FE-CB9B-8D14-DF080AA0364A}"/>
+                <a16:creationId xmlns:a16="http://schemas.microsoft.com/office/drawing/2014/main" id="{0F975B6D-C0CF-CB8C-B598-9A34EE3FAA2B}"/>
               </a:ext>
             </a:extLst>
           </p:cNvPr>
@@ -2634,7 +2634,7 @@
           <a:bodyPr/>
           <a:lstStyle/>
           <a:p>
-            <a:fld id="{E4B9EACE-8277-4F1E-B563-84ED021220C9}" type="datetimeFigureOut">
+            <a:fld id="{4C7AE7E6-2345-4D03-82D1-2A1E48CB1601}" type="datetimeFigureOut">
               <a:rPr kumimoji="1" lang="ja-JP" altLang="en-US" smtClean="0"/>
               <a:t>2026/7/30</a:t>
             </a:fld>
@@ -2647,7 +2647,7 @@
           <p:cNvPr id="6" name="フッター プレースホルダー 5">
             <a:extLst>
               <a:ext uri="{FF2B5EF4-FFF2-40B4-BE49-F238E27FC236}">
-                <a16:creationId xmlns:a16="http://schemas.microsoft.com/office/drawing/2014/main" id="{36C17F9F-E4D9-E4C0-EE57-78DF04845CB1}"/>
+                <a16:creationId xmlns:a16="http://schemas.microsoft.com/office/drawing/2014/main" id="{77F9869B-1352-4085-3C86-F258A2A3C140}"/>
               </a:ext>
             </a:extLst>
           </p:cNvPr>
@@ -2672,7 +2672,7 @@
           <p:cNvPr id="7" name="スライド番号プレースホルダー 6">
             <a:extLst>
               <a:ext uri="{FF2B5EF4-FFF2-40B4-BE49-F238E27FC236}">
-                <a16:creationId xmlns:a16="http://schemas.microsoft.com/office/drawing/2014/main" id="{2F19A9B0-DF76-414C-BF4A-89D53D133F48}"/>
+                <a16:creationId xmlns:a16="http://schemas.microsoft.com/office/drawing/2014/main" id="{FA13F6F7-3F2E-EC9C-6E65-438A6A271FE8}"/>
               </a:ext>
             </a:extLst>
           </p:cNvPr>
@@ -2688,7 +2688,7 @@
           <a:bodyPr/>
           <a:lstStyle/>
           <a:p>
-            <a:fld id="{6C15E430-0F15-437E-8189-34F82E9AE264}" type="slidenum">
+            <a:fld id="{6FFFD9CB-E791-4D08-B3EF-4C2CC3C433CD}" type="slidenum">
               <a:rPr kumimoji="1" lang="ja-JP" altLang="en-US" smtClean="0"/>
               <a:t>‹#›</a:t>
             </a:fld>
@@ -2699,7 +2699,7 @@
     </p:spTree>
     <p:extLst>
       <p:ext uri="{BB962C8B-B14F-4D97-AF65-F5344CB8AC3E}">
-        <p14:creationId xmlns:p14="http://schemas.microsoft.com/office/powerpoint/2010/main" val="787199819"/>
+        <p14:creationId xmlns:p14="http://schemas.microsoft.com/office/powerpoint/2010/main" val="585728298"/>
       </p:ext>
     </p:extLst>
   </p:cSld>
@@ -2731,7 +2731,7 @@
           <p:cNvPr id="2" name="タイトル 1">
             <a:extLst>
               <a:ext uri="{FF2B5EF4-FFF2-40B4-BE49-F238E27FC236}">
-                <a16:creationId xmlns:a16="http://schemas.microsoft.com/office/drawing/2014/main" id="{2EB8333E-460D-9399-214F-2CF2CA5B306D}"/>
+                <a16:creationId xmlns:a16="http://schemas.microsoft.com/office/drawing/2014/main" id="{315CE66A-26E9-D765-CD6B-4B7CC9680253}"/>
               </a:ext>
             </a:extLst>
           </p:cNvPr>
@@ -2768,7 +2768,7 @@
           <p:cNvPr id="3" name="図プレースホルダー 2">
             <a:extLst>
               <a:ext uri="{FF2B5EF4-FFF2-40B4-BE49-F238E27FC236}">
-                <a16:creationId xmlns:a16="http://schemas.microsoft.com/office/drawing/2014/main" id="{5159F3CD-ACBD-4589-7DB3-5F25C6CF3693}"/>
+                <a16:creationId xmlns:a16="http://schemas.microsoft.com/office/drawing/2014/main" id="{F802B1D6-72A4-969E-196C-A63211F5E340}"/>
               </a:ext>
             </a:extLst>
           </p:cNvPr>
@@ -2835,7 +2835,7 @@
           <p:cNvPr id="4" name="テキスト プレースホルダー 3">
             <a:extLst>
               <a:ext uri="{FF2B5EF4-FFF2-40B4-BE49-F238E27FC236}">
-                <a16:creationId xmlns:a16="http://schemas.microsoft.com/office/drawing/2014/main" id="{3F5EFFC7-23CF-A665-640B-37E9C6041071}"/>
+                <a16:creationId xmlns:a16="http://schemas.microsoft.com/office/drawing/2014/main" id="{0D6507CF-E4AC-6E7F-4B44-B67A1B906503}"/>
               </a:ext>
             </a:extLst>
           </p:cNvPr>
@@ -2906,7 +2906,7 @@
           <p:cNvPr id="5" name="日付プレースホルダー 4">
             <a:extLst>
               <a:ext uri="{FF2B5EF4-FFF2-40B4-BE49-F238E27FC236}">
-                <a16:creationId xmlns:a16="http://schemas.microsoft.com/office/drawing/2014/main" id="{B708C842-2F15-0AF4-345A-EA0401A3812C}"/>
+                <a16:creationId xmlns:a16="http://schemas.microsoft.com/office/drawing/2014/main" id="{113438A4-14AA-8D1E-0D80-7511ACCD5BA8}"/>
               </a:ext>
             </a:extLst>
           </p:cNvPr>
@@ -2922,7 +2922,7 @@
           <a:bodyPr/>
           <a:lstStyle/>
           <a:p>
-            <a:fld id="{E4B9EACE-8277-4F1E-B563-84ED021220C9}" type="datetimeFigureOut">
+            <a:fld id="{4C7AE7E6-2345-4D03-82D1-2A1E48CB1601}" type="datetimeFigureOut">
               <a:rPr kumimoji="1" lang="ja-JP" altLang="en-US" smtClean="0"/>
               <a:t>2026/7/30</a:t>
             </a:fld>
@@ -2935,7 +2935,7 @@
           <p:cNvPr id="6" name="フッター プレースホルダー 5">
             <a:extLst>
               <a:ext uri="{FF2B5EF4-FFF2-40B4-BE49-F238E27FC236}">
-                <a16:creationId xmlns:a16="http://schemas.microsoft.com/office/drawing/2014/main" id="{29F654BD-DFBA-A25A-59AB-368E1B5F4620}"/>
+                <a16:creationId xmlns:a16="http://schemas.microsoft.com/office/drawing/2014/main" id="{FCC39B8A-2325-4100-71AB-C471E4B0AA94}"/>
               </a:ext>
             </a:extLst>
           </p:cNvPr>
@@ -2960,7 +2960,7 @@
           <p:cNvPr id="7" name="スライド番号プレースホルダー 6">
             <a:extLst>
               <a:ext uri="{FF2B5EF4-FFF2-40B4-BE49-F238E27FC236}">
-                <a16:creationId xmlns:a16="http://schemas.microsoft.com/office/drawing/2014/main" id="{4B54FE0D-4C8F-192B-7DFA-1023E3BB15E5}"/>
+                <a16:creationId xmlns:a16="http://schemas.microsoft.com/office/drawing/2014/main" id="{96CF225D-3F6A-B6DD-A2E7-97A20166EA96}"/>
               </a:ext>
             </a:extLst>
           </p:cNvPr>
@@ -2976,7 +2976,7 @@
           <a:bodyPr/>
           <a:lstStyle/>
           <a:p>
-            <a:fld id="{6C15E430-0F15-437E-8189-34F82E9AE264}" type="slidenum">
+            <a:fld id="{6FFFD9CB-E791-4D08-B3EF-4C2CC3C433CD}" type="slidenum">
               <a:rPr kumimoji="1" lang="ja-JP" altLang="en-US" smtClean="0"/>
               <a:t>‹#›</a:t>
             </a:fld>
@@ -2987,7 +2987,7 @@
     </p:spTree>
     <p:extLst>
       <p:ext uri="{BB962C8B-B14F-4D97-AF65-F5344CB8AC3E}">
-        <p14:creationId xmlns:p14="http://schemas.microsoft.com/office/powerpoint/2010/main" val="2946259287"/>
+        <p14:creationId xmlns:p14="http://schemas.microsoft.com/office/powerpoint/2010/main" val="3762763528"/>
       </p:ext>
     </p:extLst>
   </p:cSld>
@@ -3024,7 +3024,7 @@
           <p:cNvPr id="2" name="タイトル プレースホルダー 1">
             <a:extLst>
               <a:ext uri="{FF2B5EF4-FFF2-40B4-BE49-F238E27FC236}">
-                <a16:creationId xmlns:a16="http://schemas.microsoft.com/office/drawing/2014/main" id="{FAD632FA-69B5-191C-E5DA-BC85662B96C5}"/>
+                <a16:creationId xmlns:a16="http://schemas.microsoft.com/office/drawing/2014/main" id="{EF11E8B0-53A7-F23B-3D39-E5AF7B516F39}"/>
               </a:ext>
             </a:extLst>
           </p:cNvPr>
@@ -3062,7 +3062,7 @@
           <p:cNvPr id="3" name="テキスト プレースホルダー 2">
             <a:extLst>
               <a:ext uri="{FF2B5EF4-FFF2-40B4-BE49-F238E27FC236}">
-                <a16:creationId xmlns:a16="http://schemas.microsoft.com/office/drawing/2014/main" id="{712C250B-A25B-6E2A-38EA-63BA3EFF2A8C}"/>
+                <a16:creationId xmlns:a16="http://schemas.microsoft.com/office/drawing/2014/main" id="{D31D2B91-72B1-9562-FB3D-C43AADB19B6F}"/>
               </a:ext>
             </a:extLst>
           </p:cNvPr>
@@ -3161,7 +3161,7 @@
           <p:cNvPr id="4" name="日付プレースホルダー 3">
             <a:extLst>
               <a:ext uri="{FF2B5EF4-FFF2-40B4-BE49-F238E27FC236}">
-                <a16:creationId xmlns:a16="http://schemas.microsoft.com/office/drawing/2014/main" id="{81E90167-25A2-FEE6-913D-F671A675EB68}"/>
+                <a16:creationId xmlns:a16="http://schemas.microsoft.com/office/drawing/2014/main" id="{3FE60E52-00D9-5EE1-8261-5CE24332B512}"/>
               </a:ext>
             </a:extLst>
           </p:cNvPr>
@@ -3195,7 +3195,7 @@
             </a:lvl1pPr>
           </a:lstStyle>
           <a:p>
-            <a:fld id="{E4B9EACE-8277-4F1E-B563-84ED021220C9}" type="datetimeFigureOut">
+            <a:fld id="{4C7AE7E6-2345-4D03-82D1-2A1E48CB1601}" type="datetimeFigureOut">
               <a:rPr kumimoji="1" lang="ja-JP" altLang="en-US" smtClean="0"/>
               <a:t>2026/7/30</a:t>
             </a:fld>
@@ -3208,7 +3208,7 @@
           <p:cNvPr id="5" name="フッター プレースホルダー 4">
             <a:extLst>
               <a:ext uri="{FF2B5EF4-FFF2-40B4-BE49-F238E27FC236}">
-                <a16:creationId xmlns:a16="http://schemas.microsoft.com/office/drawing/2014/main" id="{6F1D1952-AE03-CC0C-AEA8-E95BDB2BCA61}"/>
+                <a16:creationId xmlns:a16="http://schemas.microsoft.com/office/drawing/2014/main" id="{223FF984-92B8-E02B-8CA4-264DB0DDE697}"/>
               </a:ext>
             </a:extLst>
           </p:cNvPr>
@@ -3251,7 +3251,7 @@
           <p:cNvPr id="6" name="スライド番号プレースホルダー 5">
             <a:extLst>
               <a:ext uri="{FF2B5EF4-FFF2-40B4-BE49-F238E27FC236}">
-                <a16:creationId xmlns:a16="http://schemas.microsoft.com/office/drawing/2014/main" id="{B3548C4A-D509-C5EE-74B8-43823B2FFFEB}"/>
+                <a16:creationId xmlns:a16="http://schemas.microsoft.com/office/drawing/2014/main" id="{50F14A8F-8713-D692-4CE0-161F9B123528}"/>
               </a:ext>
             </a:extLst>
           </p:cNvPr>
@@ -3285,7 +3285,7 @@
             </a:lvl1pPr>
           </a:lstStyle>
           <a:p>
-            <a:fld id="{6C15E430-0F15-437E-8189-34F82E9AE264}" type="slidenum">
+            <a:fld id="{6FFFD9CB-E791-4D08-B3EF-4C2CC3C433CD}" type="slidenum">
               <a:rPr kumimoji="1" lang="ja-JP" altLang="en-US" smtClean="0"/>
               <a:t>‹#›</a:t>
             </a:fld>
@@ -3296,7 +3296,7 @@
     </p:spTree>
     <p:extLst>
       <p:ext uri="{BB962C8B-B14F-4D97-AF65-F5344CB8AC3E}">
-        <p14:creationId xmlns:p14="http://schemas.microsoft.com/office/powerpoint/2010/main" val="712520329"/>
+        <p14:creationId xmlns:p14="http://schemas.microsoft.com/office/powerpoint/2010/main" val="4154835868"/>
       </p:ext>
     </p:extLst>
   </p:cSld>
@@ -3619,7 +3619,7 @@
           <p:cNvPr id="2" name="テキスト ボックス 1">
             <a:extLst>
               <a:ext uri="{FF2B5EF4-FFF2-40B4-BE49-F238E27FC236}">
-                <a16:creationId xmlns:a16="http://schemas.microsoft.com/office/drawing/2014/main" id="{ED35FE8A-7B38-BF71-E212-9070671EEBD6}"/>
+                <a16:creationId xmlns:a16="http://schemas.microsoft.com/office/drawing/2014/main" id="{E18BB0D2-064D-5D65-0A34-0FB22EDB6EDB}"/>
               </a:ext>
             </a:extLst>
           </p:cNvPr>
@@ -3665,7 +3665,7 @@
           <p:cNvPr id="3" name="テキスト ボックス 2">
             <a:extLst>
               <a:ext uri="{FF2B5EF4-FFF2-40B4-BE49-F238E27FC236}">
-                <a16:creationId xmlns:a16="http://schemas.microsoft.com/office/drawing/2014/main" id="{6C14B121-949F-1C77-4154-058A6CE187E4}"/>
+                <a16:creationId xmlns:a16="http://schemas.microsoft.com/office/drawing/2014/main" id="{AA1F7FF8-CFBA-8E27-F84E-85F1A31E2809}"/>
               </a:ext>
             </a:extLst>
           </p:cNvPr>
@@ -3695,14 +3695,17 @@
                 </a:solidFill>
                 <a:latin typeface="Arial" panose="020B0604020202020204" pitchFamily="34" charset="0"/>
               </a:rPr>
-              <a:t>choice-compass TECH EXPLANATION</a:t>
-            </a:r>
-            <a:endParaRPr kumimoji="1" lang="ja-JP" altLang="en-US" sz="3400" b="1">
-              <a:solidFill>
-                <a:srgbClr val="111111"/>
-              </a:solidFill>
-              <a:latin typeface="Arial" panose="020B0604020202020204" pitchFamily="34" charset="0"/>
-            </a:endParaRPr>
+              <a:t>Choice Compass</a:t>
+            </a:r>
+            <a:r>
+              <a:rPr kumimoji="1" lang="ja-JP" altLang="en-US" sz="3400" b="1">
+                <a:solidFill>
+                  <a:srgbClr val="111111"/>
+                </a:solidFill>
+                <a:latin typeface="Arial" panose="020B0604020202020204" pitchFamily="34" charset="0"/>
+              </a:rPr>
+              <a:t>の技術解説</a:t>
+            </a:r>
           </a:p>
         </p:txBody>
       </p:sp>
@@ -3711,7 +3714,7 @@
           <p:cNvPr id="4" name="テキスト ボックス 3">
             <a:extLst>
               <a:ext uri="{FF2B5EF4-FFF2-40B4-BE49-F238E27FC236}">
-                <a16:creationId xmlns:a16="http://schemas.microsoft.com/office/drawing/2014/main" id="{1A6D6379-776F-3912-B494-29F30A621D5B}"/>
+                <a16:creationId xmlns:a16="http://schemas.microsoft.com/office/drawing/2014/main" id="{D9A6038E-5A7E-C259-569E-B4FDEF0B05E5}"/>
               </a:ext>
             </a:extLst>
           </p:cNvPr>
@@ -3735,20 +3738,14 @@
           <a:lstStyle/>
           <a:p>
             <a:r>
-              <a:rPr kumimoji="1" lang="en-US" altLang="ja-JP" sz="2000">
+              <a:rPr kumimoji="1" lang="ja-JP" altLang="en-US" sz="2000">
                 <a:solidFill>
                   <a:srgbClr val="333333"/>
                 </a:solidFill>
                 <a:latin typeface="Arial" panose="020B0604020202020204" pitchFamily="34" charset="0"/>
               </a:rPr>
-              <a:t>Architecture, implementation and commit history in 75 seconds</a:t>
-            </a:r>
-            <a:endParaRPr kumimoji="1" lang="ja-JP" altLang="en-US" sz="2000">
-              <a:solidFill>
-                <a:srgbClr val="333333"/>
-              </a:solidFill>
-              <a:latin typeface="Arial" panose="020B0604020202020204" pitchFamily="34" charset="0"/>
-            </a:endParaRPr>
+              <a:t>設計・実装・コミットから学ぶ短時間プレビュー</a:t>
+            </a:r>
           </a:p>
         </p:txBody>
       </p:sp>
@@ -3757,7 +3754,7 @@
           <p:cNvPr id="5" name="テキスト ボックス 4">
             <a:extLst>
               <a:ext uri="{FF2B5EF4-FFF2-40B4-BE49-F238E27FC236}">
-                <a16:creationId xmlns:a16="http://schemas.microsoft.com/office/drawing/2014/main" id="{C6AB3B7A-1BBF-B7AF-0AAA-C96210699BB5}"/>
+                <a16:creationId xmlns:a16="http://schemas.microsoft.com/office/drawing/2014/main" id="{1CCC5808-E1FD-C1B2-F96D-27ECB8F96C6C}"/>
               </a:ext>
             </a:extLst>
           </p:cNvPr>
@@ -3804,7 +3801,7 @@
             <a:hlinkClick r:id="" action="ppaction://media"/>
             <a:extLst>
               <a:ext uri="{FF2B5EF4-FFF2-40B4-BE49-F238E27FC236}">
-                <a16:creationId xmlns:a16="http://schemas.microsoft.com/office/drawing/2014/main" id="{1D8DDAFD-0037-B908-F507-C006D616D45D}"/>
+                <a16:creationId xmlns:a16="http://schemas.microsoft.com/office/drawing/2014/main" id="{07726B93-2FC6-F903-BA11-892EEBC32536}"/>
               </a:ext>
             </a:extLst>
           </p:cNvPr>
@@ -3839,7 +3836,7 @@
     </p:spTree>
     <p:extLst>
       <p:ext uri="{BB962C8B-B14F-4D97-AF65-F5344CB8AC3E}">
-        <p14:creationId xmlns:p14="http://schemas.microsoft.com/office/powerpoint/2010/main" val="3649619390"/>
+        <p14:creationId xmlns:p14="http://schemas.microsoft.com/office/powerpoint/2010/main" val="2869254582"/>
       </p:ext>
     </p:extLst>
   </p:cSld>
@@ -3963,7 +3960,7 @@
           <p:cNvPr id="2" name="テキスト ボックス 1">
             <a:extLst>
               <a:ext uri="{FF2B5EF4-FFF2-40B4-BE49-F238E27FC236}">
-                <a16:creationId xmlns:a16="http://schemas.microsoft.com/office/drawing/2014/main" id="{17C272A2-5580-73B5-0926-924247752EA9}"/>
+                <a16:creationId xmlns:a16="http://schemas.microsoft.com/office/drawing/2014/main" id="{543D2ED9-8562-5121-CFB0-D8DFBF7EE84A}"/>
               </a:ext>
             </a:extLst>
           </p:cNvPr>
@@ -4009,7 +4006,7 @@
           <p:cNvPr id="3" name="テキスト ボックス 2">
             <a:extLst>
               <a:ext uri="{FF2B5EF4-FFF2-40B4-BE49-F238E27FC236}">
-                <a16:creationId xmlns:a16="http://schemas.microsoft.com/office/drawing/2014/main" id="{E9E85E7A-8DAA-926C-FF3B-A405E7627A09}"/>
+                <a16:creationId xmlns:a16="http://schemas.microsoft.com/office/drawing/2014/main" id="{A2A5C0EC-B923-B164-80AB-8DEDAD8C3BD1}"/>
               </a:ext>
             </a:extLst>
           </p:cNvPr>
@@ -4033,20 +4030,14 @@
           <a:lstStyle/>
           <a:p>
             <a:r>
-              <a:rPr kumimoji="1" lang="en-US" altLang="ja-JP" sz="3400" b="1">
+              <a:rPr kumimoji="1" lang="ja-JP" altLang="en-US" sz="3400" b="1">
                 <a:solidFill>
                   <a:srgbClr val="111111"/>
                 </a:solidFill>
                 <a:latin typeface="Arial" panose="020B0604020202020204" pitchFamily="34" charset="0"/>
               </a:rPr>
-              <a:t>WHAT DOES IT SOLVE?</a:t>
-            </a:r>
-            <a:endParaRPr kumimoji="1" lang="ja-JP" altLang="en-US" sz="3400" b="1">
-              <a:solidFill>
-                <a:srgbClr val="111111"/>
-              </a:solidFill>
-              <a:latin typeface="Arial" panose="020B0604020202020204" pitchFamily="34" charset="0"/>
-            </a:endParaRPr>
+              <a:t>このプロジェクトは何を解決する？</a:t>
+            </a:r>
           </a:p>
         </p:txBody>
       </p:sp>
@@ -4055,7 +4046,7 @@
           <p:cNvPr id="4" name="テキスト ボックス 3">
             <a:extLst>
               <a:ext uri="{FF2B5EF4-FFF2-40B4-BE49-F238E27FC236}">
-                <a16:creationId xmlns:a16="http://schemas.microsoft.com/office/drawing/2014/main" id="{83E54B48-D00D-ED3C-00D6-A277057F46AD}"/>
+                <a16:creationId xmlns:a16="http://schemas.microsoft.com/office/drawing/2014/main" id="{6543F3D7-89AB-CD0D-B806-8E73E13AFBAF}"/>
               </a:ext>
             </a:extLst>
           </p:cNvPr>
@@ -4104,7 +4095,7 @@
           <p:cNvPr id="5" name="テキスト ボックス 4">
             <a:extLst>
               <a:ext uri="{FF2B5EF4-FFF2-40B4-BE49-F238E27FC236}">
-                <a16:creationId xmlns:a16="http://schemas.microsoft.com/office/drawing/2014/main" id="{51D68ECB-F005-A2A9-0270-73E3AFB3DF09}"/>
+                <a16:creationId xmlns:a16="http://schemas.microsoft.com/office/drawing/2014/main" id="{DDEB200F-8944-990C-2AA1-3CD8D1A64F6F}"/>
               </a:ext>
             </a:extLst>
           </p:cNvPr>
@@ -4151,7 +4142,7 @@
             <a:hlinkClick r:id="" action="ppaction://media"/>
             <a:extLst>
               <a:ext uri="{FF2B5EF4-FFF2-40B4-BE49-F238E27FC236}">
-                <a16:creationId xmlns:a16="http://schemas.microsoft.com/office/drawing/2014/main" id="{2A6F1303-A784-B9EF-7512-A375217CE418}"/>
+                <a16:creationId xmlns:a16="http://schemas.microsoft.com/office/drawing/2014/main" id="{E823116F-EC6B-4B44-BA73-F29BDAA26E53}"/>
               </a:ext>
             </a:extLst>
           </p:cNvPr>
@@ -4186,7 +4177,7 @@
     </p:spTree>
     <p:extLst>
       <p:ext uri="{BB962C8B-B14F-4D97-AF65-F5344CB8AC3E}">
-        <p14:creationId xmlns:p14="http://schemas.microsoft.com/office/powerpoint/2010/main" val="1008437767"/>
+        <p14:creationId xmlns:p14="http://schemas.microsoft.com/office/powerpoint/2010/main" val="1129031203"/>
       </p:ext>
     </p:extLst>
   </p:cSld>
@@ -4310,7 +4301,7 @@
           <p:cNvPr id="2" name="テキスト ボックス 1">
             <a:extLst>
               <a:ext uri="{FF2B5EF4-FFF2-40B4-BE49-F238E27FC236}">
-                <a16:creationId xmlns:a16="http://schemas.microsoft.com/office/drawing/2014/main" id="{6BDF0E67-899E-6C13-8FE5-F0D3949CD0FD}"/>
+                <a16:creationId xmlns:a16="http://schemas.microsoft.com/office/drawing/2014/main" id="{FC112E67-F62D-F598-3980-41BB12BF3202}"/>
               </a:ext>
             </a:extLst>
           </p:cNvPr>
@@ -4356,7 +4347,7 @@
           <p:cNvPr id="3" name="テキスト ボックス 2">
             <a:extLst>
               <a:ext uri="{FF2B5EF4-FFF2-40B4-BE49-F238E27FC236}">
-                <a16:creationId xmlns:a16="http://schemas.microsoft.com/office/drawing/2014/main" id="{5351F633-81E9-35C7-ACDE-BA70F98D2072}"/>
+                <a16:creationId xmlns:a16="http://schemas.microsoft.com/office/drawing/2014/main" id="{E8CA05F0-606C-459C-377B-F06B7F1AC345}"/>
               </a:ext>
             </a:extLst>
           </p:cNvPr>
@@ -4380,20 +4371,14 @@
           <a:lstStyle/>
           <a:p>
             <a:r>
-              <a:rPr kumimoji="1" lang="en-US" altLang="ja-JP" sz="3400" b="1">
+              <a:rPr kumimoji="1" lang="ja-JP" altLang="en-US" sz="3400" b="1">
                 <a:solidFill>
                   <a:srgbClr val="111111"/>
                 </a:solidFill>
                 <a:latin typeface="Arial" panose="020B0604020202020204" pitchFamily="34" charset="0"/>
               </a:rPr>
-              <a:t>TECH STACK</a:t>
-            </a:r>
-            <a:endParaRPr kumimoji="1" lang="ja-JP" altLang="en-US" sz="3400" b="1">
-              <a:solidFill>
-                <a:srgbClr val="111111"/>
-              </a:solidFill>
-              <a:latin typeface="Arial" panose="020B0604020202020204" pitchFamily="34" charset="0"/>
-            </a:endParaRPr>
+              <a:t>技術スタック</a:t>
+            </a:r>
           </a:p>
         </p:txBody>
       </p:sp>
@@ -4402,7 +4387,7 @@
           <p:cNvPr id="4" name="テキスト ボックス 3">
             <a:extLst>
               <a:ext uri="{FF2B5EF4-FFF2-40B4-BE49-F238E27FC236}">
-                <a16:creationId xmlns:a16="http://schemas.microsoft.com/office/drawing/2014/main" id="{DB551585-6476-A20C-9102-54034258DCCB}"/>
+                <a16:creationId xmlns:a16="http://schemas.microsoft.com/office/drawing/2014/main" id="{D1C58E2B-9BD0-EA85-098F-B6A295F0060A}"/>
               </a:ext>
             </a:extLst>
           </p:cNvPr>
@@ -4412,7 +4397,7 @@
         <p:spPr>
           <a:xfrm>
             <a:off x="533400" y="3429000"/>
-            <a:ext cx="10795000" cy="400110"/>
+            <a:ext cx="10795000" cy="707886"/>
           </a:xfrm>
           <a:prstGeom prst="rect">
             <a:avLst/>
@@ -4426,22 +4411,14 @@
           <a:lstStyle/>
           <a:p>
             <a:r>
-              <a:rPr kumimoji="1" lang="en-US" altLang="ja-JP" sz="2000">
-                <a:solidFill>
-                  <a:srgbClr val="333333"/>
-                </a:solidFill>
-                <a:latin typeface="Arial" panose="020B0604020202020204" pitchFamily="34" charset="0"/>
-              </a:rPr>
-              <a:t>Primary technologies: </a:t>
-            </a:r>
-            <a:r>
               <a:rPr kumimoji="1" lang="ja-JP" altLang="en-US" sz="2000">
                 <a:solidFill>
                   <a:srgbClr val="333333"/>
                 </a:solidFill>
                 <a:latin typeface="Arial" panose="020B0604020202020204" pitchFamily="34" charset="0"/>
               </a:rPr>
-              <a:t>未分類</a:t>
+              <a:t>主要技術：未分類
+役割を分け、保守しやすい構成を目指しています。</a:t>
             </a:r>
           </a:p>
         </p:txBody>
@@ -4451,7 +4428,7 @@
           <p:cNvPr id="5" name="テキスト ボックス 4">
             <a:extLst>
               <a:ext uri="{FF2B5EF4-FFF2-40B4-BE49-F238E27FC236}">
-                <a16:creationId xmlns:a16="http://schemas.microsoft.com/office/drawing/2014/main" id="{94D65566-71CD-F8B2-30C4-280013800CF3}"/>
+                <a16:creationId xmlns:a16="http://schemas.microsoft.com/office/drawing/2014/main" id="{8004D71D-6E39-74B5-9A79-06174AD4FFD6}"/>
               </a:ext>
             </a:extLst>
           </p:cNvPr>
@@ -4498,7 +4475,7 @@
             <a:hlinkClick r:id="" action="ppaction://media"/>
             <a:extLst>
               <a:ext uri="{FF2B5EF4-FFF2-40B4-BE49-F238E27FC236}">
-                <a16:creationId xmlns:a16="http://schemas.microsoft.com/office/drawing/2014/main" id="{FE04734D-1345-3748-A571-945F949926D3}"/>
+                <a16:creationId xmlns:a16="http://schemas.microsoft.com/office/drawing/2014/main" id="{1A8D600E-69B6-1673-FC80-F5B0BCCB0FEA}"/>
               </a:ext>
             </a:extLst>
           </p:cNvPr>
@@ -4533,7 +4510,7 @@
     </p:spTree>
     <p:extLst>
       <p:ext uri="{BB962C8B-B14F-4D97-AF65-F5344CB8AC3E}">
-        <p14:creationId xmlns:p14="http://schemas.microsoft.com/office/powerpoint/2010/main" val="621218657"/>
+        <p14:creationId xmlns:p14="http://schemas.microsoft.com/office/powerpoint/2010/main" val="17513745"/>
       </p:ext>
     </p:extLst>
   </p:cSld>
@@ -4657,7 +4634,7 @@
           <p:cNvPr id="2" name="テキスト ボックス 1">
             <a:extLst>
               <a:ext uri="{FF2B5EF4-FFF2-40B4-BE49-F238E27FC236}">
-                <a16:creationId xmlns:a16="http://schemas.microsoft.com/office/drawing/2014/main" id="{B70965E6-72E0-EBDE-20F2-EA6D79C4F1BA}"/>
+                <a16:creationId xmlns:a16="http://schemas.microsoft.com/office/drawing/2014/main" id="{70202778-1661-7B31-7FC5-60F21CFD5873}"/>
               </a:ext>
             </a:extLst>
           </p:cNvPr>
@@ -4703,7 +4680,7 @@
           <p:cNvPr id="3" name="テキスト ボックス 2">
             <a:extLst>
               <a:ext uri="{FF2B5EF4-FFF2-40B4-BE49-F238E27FC236}">
-                <a16:creationId xmlns:a16="http://schemas.microsoft.com/office/drawing/2014/main" id="{8013CC95-9CDB-5C98-2279-30DAFA3A6845}"/>
+                <a16:creationId xmlns:a16="http://schemas.microsoft.com/office/drawing/2014/main" id="{5D336F70-31F2-A48D-64B4-967A2A29AE0B}"/>
               </a:ext>
             </a:extLst>
           </p:cNvPr>
@@ -4727,20 +4704,14 @@
           <a:lstStyle/>
           <a:p>
             <a:r>
-              <a:rPr kumimoji="1" lang="en-US" altLang="ja-JP" sz="3400" b="1">
+              <a:rPr kumimoji="1" lang="ja-JP" altLang="en-US" sz="3400" b="1">
                 <a:solidFill>
                   <a:srgbClr val="111111"/>
                 </a:solidFill>
                 <a:latin typeface="Arial" panose="020B0604020202020204" pitchFamily="34" charset="0"/>
               </a:rPr>
-              <a:t>REPOSITORY HIGHLIGHTS</a:t>
-            </a:r>
-            <a:endParaRPr kumimoji="1" lang="ja-JP" altLang="en-US" sz="3400" b="1">
-              <a:solidFill>
-                <a:srgbClr val="111111"/>
-              </a:solidFill>
-              <a:latin typeface="Arial" panose="020B0604020202020204" pitchFamily="34" charset="0"/>
-            </a:endParaRPr>
+              <a:t>リポジトリの読みどころ</a:t>
+            </a:r>
           </a:p>
         </p:txBody>
       </p:sp>
@@ -4749,7 +4720,7 @@
           <p:cNvPr id="4" name="テキスト ボックス 3">
             <a:extLst>
               <a:ext uri="{FF2B5EF4-FFF2-40B4-BE49-F238E27FC236}">
-                <a16:creationId xmlns:a16="http://schemas.microsoft.com/office/drawing/2014/main" id="{710F3461-4E1C-A13D-D7E1-96162108D5D2}"/>
+                <a16:creationId xmlns:a16="http://schemas.microsoft.com/office/drawing/2014/main" id="{37ADD05F-B05A-F2D8-49D6-288075851237}"/>
               </a:ext>
             </a:extLst>
           </p:cNvPr>
@@ -4759,7 +4730,7 @@
         <p:spPr>
           <a:xfrm>
             <a:off x="533400" y="3429000"/>
-            <a:ext cx="10795000" cy="400110"/>
+            <a:ext cx="10795000" cy="707886"/>
           </a:xfrm>
           <a:prstGeom prst="rect">
             <a:avLst/>
@@ -4773,20 +4744,33 @@
           <a:lstStyle/>
           <a:p>
             <a:r>
+              <a:rPr kumimoji="1" lang="ja-JP" altLang="en-US" sz="2000">
+                <a:solidFill>
+                  <a:srgbClr val="333333"/>
+                </a:solidFill>
+                <a:latin typeface="Arial" panose="020B0604020202020204" pitchFamily="34" charset="0"/>
+              </a:rPr>
+              <a:t>公開コード、</a:t>
+            </a:r>
+            <a:r>
               <a:rPr kumimoji="1" lang="en-US" altLang="ja-JP" sz="2000">
                 <a:solidFill>
                   <a:srgbClr val="333333"/>
                 </a:solidFill>
                 <a:latin typeface="Arial" panose="020B0604020202020204" pitchFamily="34" charset="0"/>
               </a:rPr>
-              <a:t>Public source code, README and commit history reveal the design decisions.</a:t>
-            </a:r>
-            <a:endParaRPr kumimoji="1" lang="ja-JP" altLang="en-US" sz="2000">
-              <a:solidFill>
-                <a:srgbClr val="333333"/>
-              </a:solidFill>
-              <a:latin typeface="Arial" panose="020B0604020202020204" pitchFamily="34" charset="0"/>
-            </a:endParaRPr>
+              <a:t>README</a:t>
+            </a:r>
+            <a:r>
+              <a:rPr kumimoji="1" lang="ja-JP" altLang="en-US" sz="2000">
+                <a:solidFill>
+                  <a:srgbClr val="333333"/>
+                </a:solidFill>
+                <a:latin typeface="Arial" panose="020B0604020202020204" pitchFamily="34" charset="0"/>
+              </a:rPr>
+              <a:t>、コミット履歴から設計判断を確認できます。
+主なファイル：主要なソースファイル</a:t>
+            </a:r>
           </a:p>
         </p:txBody>
       </p:sp>
@@ -4795,7 +4779,7 @@
           <p:cNvPr id="5" name="テキスト ボックス 4">
             <a:extLst>
               <a:ext uri="{FF2B5EF4-FFF2-40B4-BE49-F238E27FC236}">
-                <a16:creationId xmlns:a16="http://schemas.microsoft.com/office/drawing/2014/main" id="{8B56FEEE-2918-FFAF-CFAA-1E22284331DD}"/>
+                <a16:creationId xmlns:a16="http://schemas.microsoft.com/office/drawing/2014/main" id="{7238DF70-45D5-52CE-63FE-CEBE0ECDAB0F}"/>
               </a:ext>
             </a:extLst>
           </p:cNvPr>
@@ -4842,7 +4826,7 @@
             <a:hlinkClick r:id="" action="ppaction://media"/>
             <a:extLst>
               <a:ext uri="{FF2B5EF4-FFF2-40B4-BE49-F238E27FC236}">
-                <a16:creationId xmlns:a16="http://schemas.microsoft.com/office/drawing/2014/main" id="{14E87A6A-FB20-D4F6-BACC-EABE1BC9C430}"/>
+                <a16:creationId xmlns:a16="http://schemas.microsoft.com/office/drawing/2014/main" id="{43C19BCA-09C4-6AA9-9237-F87C77FAD8F7}"/>
               </a:ext>
             </a:extLst>
           </p:cNvPr>
@@ -4877,7 +4861,7 @@
     </p:spTree>
     <p:extLst>
       <p:ext uri="{BB962C8B-B14F-4D97-AF65-F5344CB8AC3E}">
-        <p14:creationId xmlns:p14="http://schemas.microsoft.com/office/powerpoint/2010/main" val="3083970762"/>
+        <p14:creationId xmlns:p14="http://schemas.microsoft.com/office/powerpoint/2010/main" val="402542542"/>
       </p:ext>
     </p:extLst>
   </p:cSld>
@@ -5001,7 +4985,7 @@
           <p:cNvPr id="2" name="テキスト ボックス 1">
             <a:extLst>
               <a:ext uri="{FF2B5EF4-FFF2-40B4-BE49-F238E27FC236}">
-                <a16:creationId xmlns:a16="http://schemas.microsoft.com/office/drawing/2014/main" id="{D83D932B-7325-C9EF-B1C4-FE7882273C39}"/>
+                <a16:creationId xmlns:a16="http://schemas.microsoft.com/office/drawing/2014/main" id="{ADD8C381-9F22-B784-98CD-860AC2D1506D}"/>
               </a:ext>
             </a:extLst>
           </p:cNvPr>
@@ -5047,7 +5031,7 @@
           <p:cNvPr id="3" name="テキスト ボックス 2">
             <a:extLst>
               <a:ext uri="{FF2B5EF4-FFF2-40B4-BE49-F238E27FC236}">
-                <a16:creationId xmlns:a16="http://schemas.microsoft.com/office/drawing/2014/main" id="{C62CF54B-B9C3-1618-0757-85B773A3A67E}"/>
+                <a16:creationId xmlns:a16="http://schemas.microsoft.com/office/drawing/2014/main" id="{17BF50C5-EED2-B982-46E2-4EC271FDC521}"/>
               </a:ext>
             </a:extLst>
           </p:cNvPr>
@@ -5071,20 +5055,14 @@
           <a:lstStyle/>
           <a:p>
             <a:r>
-              <a:rPr kumimoji="1" lang="en-US" altLang="ja-JP" sz="3400" b="1">
+              <a:rPr kumimoji="1" lang="ja-JP" altLang="en-US" sz="3400" b="1">
                 <a:solidFill>
                   <a:srgbClr val="111111"/>
                 </a:solidFill>
                 <a:latin typeface="Arial" panose="020B0604020202020204" pitchFamily="34" charset="0"/>
               </a:rPr>
-              <a:t>ITERATIVE IMPROVEMENT</a:t>
-            </a:r>
-            <a:endParaRPr kumimoji="1" lang="ja-JP" altLang="en-US" sz="3400" b="1">
-              <a:solidFill>
-                <a:srgbClr val="111111"/>
-              </a:solidFill>
-              <a:latin typeface="Arial" panose="020B0604020202020204" pitchFamily="34" charset="0"/>
-            </a:endParaRPr>
+              <a:t>コミットから分かる改善</a:t>
+            </a:r>
           </a:p>
         </p:txBody>
       </p:sp>
@@ -5093,7 +5071,7 @@
           <p:cNvPr id="4" name="テキスト ボックス 3">
             <a:extLst>
               <a:ext uri="{FF2B5EF4-FFF2-40B4-BE49-F238E27FC236}">
-                <a16:creationId xmlns:a16="http://schemas.microsoft.com/office/drawing/2014/main" id="{82F27FBD-46F9-7307-DB24-429CC8024A70}"/>
+                <a16:creationId xmlns:a16="http://schemas.microsoft.com/office/drawing/2014/main" id="{B818FADE-A029-69AB-EFDE-F6960D20B4B3}"/>
               </a:ext>
             </a:extLst>
           </p:cNvPr>
@@ -5123,7 +5101,7 @@
                 </a:solidFill>
                 <a:latin typeface="Arial" panose="020B0604020202020204" pitchFamily="34" charset="0"/>
               </a:rPr>
-              <a:t>Small commits continuously improve features, quality and release readiness.</a:t>
+              <a:t>Initialize repository</a:t>
             </a:r>
             <a:endParaRPr kumimoji="1" lang="ja-JP" altLang="en-US" sz="2000">
               <a:solidFill>
@@ -5139,7 +5117,7 @@
           <p:cNvPr id="5" name="テキスト ボックス 4">
             <a:extLst>
               <a:ext uri="{FF2B5EF4-FFF2-40B4-BE49-F238E27FC236}">
-                <a16:creationId xmlns:a16="http://schemas.microsoft.com/office/drawing/2014/main" id="{AF4B8A26-28F5-5107-CE6C-5DDB376786E5}"/>
+                <a16:creationId xmlns:a16="http://schemas.microsoft.com/office/drawing/2014/main" id="{B2B6E7E5-E2A7-FFD7-E200-C1452BCFDEE6}"/>
               </a:ext>
             </a:extLst>
           </p:cNvPr>
@@ -5186,7 +5164,7 @@
             <a:hlinkClick r:id="" action="ppaction://media"/>
             <a:extLst>
               <a:ext uri="{FF2B5EF4-FFF2-40B4-BE49-F238E27FC236}">
-                <a16:creationId xmlns:a16="http://schemas.microsoft.com/office/drawing/2014/main" id="{FE28A3FC-186C-9F31-E5D7-8730AC47AE3D}"/>
+                <a16:creationId xmlns:a16="http://schemas.microsoft.com/office/drawing/2014/main" id="{06B42E42-9A40-5DBA-2D68-DB8909CBEF01}"/>
               </a:ext>
             </a:extLst>
           </p:cNvPr>
@@ -5221,7 +5199,7 @@
     </p:spTree>
     <p:extLst>
       <p:ext uri="{BB962C8B-B14F-4D97-AF65-F5344CB8AC3E}">
-        <p14:creationId xmlns:p14="http://schemas.microsoft.com/office/powerpoint/2010/main" val="2360821301"/>
+        <p14:creationId xmlns:p14="http://schemas.microsoft.com/office/powerpoint/2010/main" val="3638811388"/>
       </p:ext>
     </p:extLst>
   </p:cSld>
@@ -5345,7 +5323,7 @@
           <p:cNvPr id="2" name="テキスト ボックス 1">
             <a:extLst>
               <a:ext uri="{FF2B5EF4-FFF2-40B4-BE49-F238E27FC236}">
-                <a16:creationId xmlns:a16="http://schemas.microsoft.com/office/drawing/2014/main" id="{F26B58F9-8F77-D219-FE26-C978A6E31A2A}"/>
+                <a16:creationId xmlns:a16="http://schemas.microsoft.com/office/drawing/2014/main" id="{508DC850-4DEB-536D-F3BA-0B9C04E8BD4C}"/>
               </a:ext>
             </a:extLst>
           </p:cNvPr>
@@ -5391,7 +5369,7 @@
           <p:cNvPr id="3" name="テキスト ボックス 2">
             <a:extLst>
               <a:ext uri="{FF2B5EF4-FFF2-40B4-BE49-F238E27FC236}">
-                <a16:creationId xmlns:a16="http://schemas.microsoft.com/office/drawing/2014/main" id="{CD6E63E5-8F12-8724-3418-C453DAA2107F}"/>
+                <a16:creationId xmlns:a16="http://schemas.microsoft.com/office/drawing/2014/main" id="{722DE064-3715-1A45-5A09-4700A6CA0BF7}"/>
               </a:ext>
             </a:extLst>
           </p:cNvPr>
@@ -5415,20 +5393,14 @@
           <a:lstStyle/>
           <a:p>
             <a:r>
-              <a:rPr kumimoji="1" lang="en-US" altLang="ja-JP" sz="3400" b="1">
+              <a:rPr kumimoji="1" lang="ja-JP" altLang="en-US" sz="3400" b="1">
                 <a:solidFill>
                   <a:srgbClr val="111111"/>
                 </a:solidFill>
                 <a:latin typeface="Arial" panose="020B0604020202020204" pitchFamily="34" charset="0"/>
               </a:rPr>
-              <a:t>READ THE FULL ARTICLE</a:t>
-            </a:r>
-            <a:endParaRPr kumimoji="1" lang="ja-JP" altLang="en-US" sz="3400" b="1">
-              <a:solidFill>
-                <a:srgbClr val="111111"/>
-              </a:solidFill>
-              <a:latin typeface="Arial" panose="020B0604020202020204" pitchFamily="34" charset="0"/>
-            </a:endParaRPr>
+              <a:t>詳しくは積み上げログへ</a:t>
+            </a:r>
           </a:p>
         </p:txBody>
       </p:sp>
@@ -5437,7 +5409,7 @@
           <p:cNvPr id="4" name="テキスト ボックス 3">
             <a:extLst>
               <a:ext uri="{FF2B5EF4-FFF2-40B4-BE49-F238E27FC236}">
-                <a16:creationId xmlns:a16="http://schemas.microsoft.com/office/drawing/2014/main" id="{5F5FD722-C733-ED56-A15A-BD73F6E9BF53}"/>
+                <a16:creationId xmlns:a16="http://schemas.microsoft.com/office/drawing/2014/main" id="{E3829E16-4DE0-F992-FAB0-5A508F560ACD}"/>
               </a:ext>
             </a:extLst>
           </p:cNvPr>
@@ -5461,14 +5433,32 @@
           <a:lstStyle/>
           <a:p>
             <a:r>
-              <a:rPr kumimoji="1" lang="sv-SE" altLang="ja-JP" sz="2000">
+              <a:rPr kumimoji="1" lang="zh-TW" altLang="en-US" sz="2000">
+                <a:solidFill>
+                  <a:srgbClr val="333333"/>
+                </a:solidFill>
+                <a:latin typeface="Arial" panose="020B0604020202020204" pitchFamily="34" charset="0"/>
+              </a:rPr>
+              <a:t>記事： </a:t>
+            </a:r>
+            <a:r>
+              <a:rPr kumimoji="1" lang="en-US" altLang="zh-TW" sz="2000">
                 <a:solidFill>
                   <a:srgbClr val="333333"/>
                 </a:solidFill>
                 <a:latin typeface="Arial" panose="020B0604020202020204" pitchFamily="34" charset="0"/>
               </a:rPr>
               <a:t>https://syunnjack.dev/articles/choice-compass
-TSUMIAGE LOG</a:t>
+</a:t>
+            </a:r>
+            <a:r>
+              <a:rPr kumimoji="1" lang="zh-TW" altLang="en-US" sz="2000">
+                <a:solidFill>
+                  <a:srgbClr val="333333"/>
+                </a:solidFill>
+                <a:latin typeface="Arial" panose="020B0604020202020204" pitchFamily="34" charset="0"/>
+              </a:rPr>
+              <a:t>学び、作り、振り返る開発記録。</a:t>
             </a:r>
             <a:endParaRPr kumimoji="1" lang="ja-JP" altLang="en-US" sz="2000">
               <a:solidFill>
@@ -5484,7 +5474,7 @@
           <p:cNvPr id="5" name="テキスト ボックス 4">
             <a:extLst>
               <a:ext uri="{FF2B5EF4-FFF2-40B4-BE49-F238E27FC236}">
-                <a16:creationId xmlns:a16="http://schemas.microsoft.com/office/drawing/2014/main" id="{36581B27-2D06-A5BE-09A7-6A045A6421E0}"/>
+                <a16:creationId xmlns:a16="http://schemas.microsoft.com/office/drawing/2014/main" id="{3A3F1206-8F8D-0541-7AFE-0C3173F1E6F5}"/>
               </a:ext>
             </a:extLst>
           </p:cNvPr>
@@ -5531,7 +5521,7 @@
             <a:hlinkClick r:id="" action="ppaction://media"/>
             <a:extLst>
               <a:ext uri="{FF2B5EF4-FFF2-40B4-BE49-F238E27FC236}">
-                <a16:creationId xmlns:a16="http://schemas.microsoft.com/office/drawing/2014/main" id="{9BB09589-5B39-F027-F5D7-7DA3C6E395EE}"/>
+                <a16:creationId xmlns:a16="http://schemas.microsoft.com/office/drawing/2014/main" id="{3E980B15-223D-FB51-1C4D-2D455B8DE0FD}"/>
               </a:ext>
             </a:extLst>
           </p:cNvPr>
@@ -5566,7 +5556,7 @@
     </p:spTree>
     <p:extLst>
       <p:ext uri="{BB962C8B-B14F-4D97-AF65-F5344CB8AC3E}">
-        <p14:creationId xmlns:p14="http://schemas.microsoft.com/office/powerpoint/2010/main" val="3590531842"/>
+        <p14:creationId xmlns:p14="http://schemas.microsoft.com/office/powerpoint/2010/main" val="2481423351"/>
       </p:ext>
     </p:extLst>
   </p:cSld>

--- a/public/videos/repositories/choice-compass/choice-compass-tech-preview.pptx
+++ b/public/videos/repositories/choice-compass/choice-compass-tech-preview.pptx
@@ -134,7 +134,7 @@
           <p:cNvPr id="2" name="タイトル 1">
             <a:extLst>
               <a:ext uri="{FF2B5EF4-FFF2-40B4-BE49-F238E27FC236}">
-                <a16:creationId xmlns:a16="http://schemas.microsoft.com/office/drawing/2014/main" id="{12527414-9551-2B30-9C9F-512CEDEF391A}"/>
+                <a16:creationId xmlns:a16="http://schemas.microsoft.com/office/drawing/2014/main" id="{78FC4AEB-6A93-1856-A792-5BF31F846D11}"/>
               </a:ext>
             </a:extLst>
           </p:cNvPr>
@@ -171,7 +171,7 @@
           <p:cNvPr id="3" name="字幕 2">
             <a:extLst>
               <a:ext uri="{FF2B5EF4-FFF2-40B4-BE49-F238E27FC236}">
-                <a16:creationId xmlns:a16="http://schemas.microsoft.com/office/drawing/2014/main" id="{B57D1025-1435-1901-5674-DC1CAD93F5EA}"/>
+                <a16:creationId xmlns:a16="http://schemas.microsoft.com/office/drawing/2014/main" id="{925C6619-7558-0FC2-526F-FA73333115B2}"/>
               </a:ext>
             </a:extLst>
           </p:cNvPr>
@@ -241,7 +241,7 @@
           <p:cNvPr id="4" name="日付プレースホルダー 3">
             <a:extLst>
               <a:ext uri="{FF2B5EF4-FFF2-40B4-BE49-F238E27FC236}">
-                <a16:creationId xmlns:a16="http://schemas.microsoft.com/office/drawing/2014/main" id="{F03FF190-6B46-BCCA-5DD1-F3DA65F9D22D}"/>
+                <a16:creationId xmlns:a16="http://schemas.microsoft.com/office/drawing/2014/main" id="{FE1E520B-5289-F5E3-D288-CCCA1B0354FC}"/>
               </a:ext>
             </a:extLst>
           </p:cNvPr>
@@ -257,7 +257,7 @@
           <a:bodyPr/>
           <a:lstStyle/>
           <a:p>
-            <a:fld id="{4C7AE7E6-2345-4D03-82D1-2A1E48CB1601}" type="datetimeFigureOut">
+            <a:fld id="{0353D321-9D72-4F5C-805B-BCC046E366F8}" type="datetimeFigureOut">
               <a:rPr kumimoji="1" lang="ja-JP" altLang="en-US" smtClean="0"/>
               <a:t>2026/7/30</a:t>
             </a:fld>
@@ -270,7 +270,7 @@
           <p:cNvPr id="5" name="フッター プレースホルダー 4">
             <a:extLst>
               <a:ext uri="{FF2B5EF4-FFF2-40B4-BE49-F238E27FC236}">
-                <a16:creationId xmlns:a16="http://schemas.microsoft.com/office/drawing/2014/main" id="{B86BF779-1D9B-7F35-08D5-0FCD2B1E0CE4}"/>
+                <a16:creationId xmlns:a16="http://schemas.microsoft.com/office/drawing/2014/main" id="{577AAA8A-101D-789C-712D-E16DC6AA4F8C}"/>
               </a:ext>
             </a:extLst>
           </p:cNvPr>
@@ -295,7 +295,7 @@
           <p:cNvPr id="6" name="スライド番号プレースホルダー 5">
             <a:extLst>
               <a:ext uri="{FF2B5EF4-FFF2-40B4-BE49-F238E27FC236}">
-                <a16:creationId xmlns:a16="http://schemas.microsoft.com/office/drawing/2014/main" id="{0A7D8B92-D13C-A926-037F-950F186E1EB1}"/>
+                <a16:creationId xmlns:a16="http://schemas.microsoft.com/office/drawing/2014/main" id="{A9B8BCF6-B499-E396-9231-E0B39DA2CF39}"/>
               </a:ext>
             </a:extLst>
           </p:cNvPr>
@@ -311,7 +311,7 @@
           <a:bodyPr/>
           <a:lstStyle/>
           <a:p>
-            <a:fld id="{6FFFD9CB-E791-4D08-B3EF-4C2CC3C433CD}" type="slidenum">
+            <a:fld id="{C940496C-795B-448C-A3CC-3E5AB020109C}" type="slidenum">
               <a:rPr kumimoji="1" lang="ja-JP" altLang="en-US" smtClean="0"/>
               <a:t>‹#›</a:t>
             </a:fld>
@@ -322,7 +322,7 @@
     </p:spTree>
     <p:extLst>
       <p:ext uri="{BB962C8B-B14F-4D97-AF65-F5344CB8AC3E}">
-        <p14:creationId xmlns:p14="http://schemas.microsoft.com/office/powerpoint/2010/main" val="2771231820"/>
+        <p14:creationId xmlns:p14="http://schemas.microsoft.com/office/powerpoint/2010/main" val="2422021669"/>
       </p:ext>
     </p:extLst>
   </p:cSld>
@@ -354,7 +354,7 @@
           <p:cNvPr id="2" name="タイトル 1">
             <a:extLst>
               <a:ext uri="{FF2B5EF4-FFF2-40B4-BE49-F238E27FC236}">
-                <a16:creationId xmlns:a16="http://schemas.microsoft.com/office/drawing/2014/main" id="{B31CB482-8DCB-9B8C-74C2-4329091EE529}"/>
+                <a16:creationId xmlns:a16="http://schemas.microsoft.com/office/drawing/2014/main" id="{1B9550F3-19C6-E192-BF5E-4BA5FDA642B4}"/>
               </a:ext>
             </a:extLst>
           </p:cNvPr>
@@ -382,7 +382,7 @@
           <p:cNvPr id="3" name="縦書きテキスト プレースホルダー 2">
             <a:extLst>
               <a:ext uri="{FF2B5EF4-FFF2-40B4-BE49-F238E27FC236}">
-                <a16:creationId xmlns:a16="http://schemas.microsoft.com/office/drawing/2014/main" id="{7102C786-6545-6FEC-C4D6-30D52821CDB9}"/>
+                <a16:creationId xmlns:a16="http://schemas.microsoft.com/office/drawing/2014/main" id="{B514DF0D-5450-C415-73A0-73A80E44DAA4}"/>
               </a:ext>
             </a:extLst>
           </p:cNvPr>
@@ -471,7 +471,7 @@
           <p:cNvPr id="4" name="日付プレースホルダー 3">
             <a:extLst>
               <a:ext uri="{FF2B5EF4-FFF2-40B4-BE49-F238E27FC236}">
-                <a16:creationId xmlns:a16="http://schemas.microsoft.com/office/drawing/2014/main" id="{457CE8AC-B810-A536-CEE2-A912A2BB18FA}"/>
+                <a16:creationId xmlns:a16="http://schemas.microsoft.com/office/drawing/2014/main" id="{7A038786-8379-EBC7-9EE6-0E2F6828B1C6}"/>
               </a:ext>
             </a:extLst>
           </p:cNvPr>
@@ -487,7 +487,7 @@
           <a:bodyPr/>
           <a:lstStyle/>
           <a:p>
-            <a:fld id="{4C7AE7E6-2345-4D03-82D1-2A1E48CB1601}" type="datetimeFigureOut">
+            <a:fld id="{0353D321-9D72-4F5C-805B-BCC046E366F8}" type="datetimeFigureOut">
               <a:rPr kumimoji="1" lang="ja-JP" altLang="en-US" smtClean="0"/>
               <a:t>2026/7/30</a:t>
             </a:fld>
@@ -500,7 +500,7 @@
           <p:cNvPr id="5" name="フッター プレースホルダー 4">
             <a:extLst>
               <a:ext uri="{FF2B5EF4-FFF2-40B4-BE49-F238E27FC236}">
-                <a16:creationId xmlns:a16="http://schemas.microsoft.com/office/drawing/2014/main" id="{0F93713B-E617-0528-F9E0-C187662B6B5F}"/>
+                <a16:creationId xmlns:a16="http://schemas.microsoft.com/office/drawing/2014/main" id="{1DCD45DA-F4FB-9078-4084-4BFC3536B523}"/>
               </a:ext>
             </a:extLst>
           </p:cNvPr>
@@ -525,7 +525,7 @@
           <p:cNvPr id="6" name="スライド番号プレースホルダー 5">
             <a:extLst>
               <a:ext uri="{FF2B5EF4-FFF2-40B4-BE49-F238E27FC236}">
-                <a16:creationId xmlns:a16="http://schemas.microsoft.com/office/drawing/2014/main" id="{F3DAA11E-8523-18C9-D478-3D6E701C6B73}"/>
+                <a16:creationId xmlns:a16="http://schemas.microsoft.com/office/drawing/2014/main" id="{C1CEE5CD-CA9C-DE30-7C94-D340D0B4AB8C}"/>
               </a:ext>
             </a:extLst>
           </p:cNvPr>
@@ -541,7 +541,7 @@
           <a:bodyPr/>
           <a:lstStyle/>
           <a:p>
-            <a:fld id="{6FFFD9CB-E791-4D08-B3EF-4C2CC3C433CD}" type="slidenum">
+            <a:fld id="{C940496C-795B-448C-A3CC-3E5AB020109C}" type="slidenum">
               <a:rPr kumimoji="1" lang="ja-JP" altLang="en-US" smtClean="0"/>
               <a:t>‹#›</a:t>
             </a:fld>
@@ -552,7 +552,7 @@
     </p:spTree>
     <p:extLst>
       <p:ext uri="{BB962C8B-B14F-4D97-AF65-F5344CB8AC3E}">
-        <p14:creationId xmlns:p14="http://schemas.microsoft.com/office/powerpoint/2010/main" val="3038005131"/>
+        <p14:creationId xmlns:p14="http://schemas.microsoft.com/office/powerpoint/2010/main" val="3970322354"/>
       </p:ext>
     </p:extLst>
   </p:cSld>
@@ -584,7 +584,7 @@
           <p:cNvPr id="2" name="縦書きタイトル 1">
             <a:extLst>
               <a:ext uri="{FF2B5EF4-FFF2-40B4-BE49-F238E27FC236}">
-                <a16:creationId xmlns:a16="http://schemas.microsoft.com/office/drawing/2014/main" id="{561336EA-10D1-C307-F2A0-F9A2418E94BB}"/>
+                <a16:creationId xmlns:a16="http://schemas.microsoft.com/office/drawing/2014/main" id="{8F968072-2518-D5CA-F34A-A486ABA93F0B}"/>
               </a:ext>
             </a:extLst>
           </p:cNvPr>
@@ -617,7 +617,7 @@
           <p:cNvPr id="3" name="縦書きテキスト プレースホルダー 2">
             <a:extLst>
               <a:ext uri="{FF2B5EF4-FFF2-40B4-BE49-F238E27FC236}">
-                <a16:creationId xmlns:a16="http://schemas.microsoft.com/office/drawing/2014/main" id="{661EF2B8-0A27-5466-7C25-D33BE8EA5A2E}"/>
+                <a16:creationId xmlns:a16="http://schemas.microsoft.com/office/drawing/2014/main" id="{1D168B38-5013-9EC6-E729-268ED83677BD}"/>
               </a:ext>
             </a:extLst>
           </p:cNvPr>
@@ -711,7 +711,7 @@
           <p:cNvPr id="4" name="日付プレースホルダー 3">
             <a:extLst>
               <a:ext uri="{FF2B5EF4-FFF2-40B4-BE49-F238E27FC236}">
-                <a16:creationId xmlns:a16="http://schemas.microsoft.com/office/drawing/2014/main" id="{A2510714-6C5E-4BFC-8DBF-8450BC5B3CB4}"/>
+                <a16:creationId xmlns:a16="http://schemas.microsoft.com/office/drawing/2014/main" id="{D5DE2FFE-C6B9-1360-9DF8-5B4FF7BB83C9}"/>
               </a:ext>
             </a:extLst>
           </p:cNvPr>
@@ -727,7 +727,7 @@
           <a:bodyPr/>
           <a:lstStyle/>
           <a:p>
-            <a:fld id="{4C7AE7E6-2345-4D03-82D1-2A1E48CB1601}" type="datetimeFigureOut">
+            <a:fld id="{0353D321-9D72-4F5C-805B-BCC046E366F8}" type="datetimeFigureOut">
               <a:rPr kumimoji="1" lang="ja-JP" altLang="en-US" smtClean="0"/>
               <a:t>2026/7/30</a:t>
             </a:fld>
@@ -740,7 +740,7 @@
           <p:cNvPr id="5" name="フッター プレースホルダー 4">
             <a:extLst>
               <a:ext uri="{FF2B5EF4-FFF2-40B4-BE49-F238E27FC236}">
-                <a16:creationId xmlns:a16="http://schemas.microsoft.com/office/drawing/2014/main" id="{CC12B265-20BC-DDF8-3BE0-A523806C0BB9}"/>
+                <a16:creationId xmlns:a16="http://schemas.microsoft.com/office/drawing/2014/main" id="{A89029EB-320A-9F4F-80F8-EB4B56E72F68}"/>
               </a:ext>
             </a:extLst>
           </p:cNvPr>
@@ -765,7 +765,7 @@
           <p:cNvPr id="6" name="スライド番号プレースホルダー 5">
             <a:extLst>
               <a:ext uri="{FF2B5EF4-FFF2-40B4-BE49-F238E27FC236}">
-                <a16:creationId xmlns:a16="http://schemas.microsoft.com/office/drawing/2014/main" id="{A4D8C851-07F3-E343-426E-C81794B67AE4}"/>
+                <a16:creationId xmlns:a16="http://schemas.microsoft.com/office/drawing/2014/main" id="{EB43DCE5-1F4F-B3A6-6911-F24A8DD5516A}"/>
               </a:ext>
             </a:extLst>
           </p:cNvPr>
@@ -781,7 +781,7 @@
           <a:bodyPr/>
           <a:lstStyle/>
           <a:p>
-            <a:fld id="{6FFFD9CB-E791-4D08-B3EF-4C2CC3C433CD}" type="slidenum">
+            <a:fld id="{C940496C-795B-448C-A3CC-3E5AB020109C}" type="slidenum">
               <a:rPr kumimoji="1" lang="ja-JP" altLang="en-US" smtClean="0"/>
               <a:t>‹#›</a:t>
             </a:fld>
@@ -792,7 +792,7 @@
     </p:spTree>
     <p:extLst>
       <p:ext uri="{BB962C8B-B14F-4D97-AF65-F5344CB8AC3E}">
-        <p14:creationId xmlns:p14="http://schemas.microsoft.com/office/powerpoint/2010/main" val="856827307"/>
+        <p14:creationId xmlns:p14="http://schemas.microsoft.com/office/powerpoint/2010/main" val="493008322"/>
       </p:ext>
     </p:extLst>
   </p:cSld>
@@ -824,7 +824,7 @@
           <p:cNvPr id="2" name="タイトル 1">
             <a:extLst>
               <a:ext uri="{FF2B5EF4-FFF2-40B4-BE49-F238E27FC236}">
-                <a16:creationId xmlns:a16="http://schemas.microsoft.com/office/drawing/2014/main" id="{C6BF2CA3-3D1C-6E54-73F6-0A24D50BC8A5}"/>
+                <a16:creationId xmlns:a16="http://schemas.microsoft.com/office/drawing/2014/main" id="{73AC9CE2-5B8C-97D4-9AF4-5CFCD718D403}"/>
               </a:ext>
             </a:extLst>
           </p:cNvPr>
@@ -852,7 +852,7 @@
           <p:cNvPr id="3" name="コンテンツ プレースホルダー 2">
             <a:extLst>
               <a:ext uri="{FF2B5EF4-FFF2-40B4-BE49-F238E27FC236}">
-                <a16:creationId xmlns:a16="http://schemas.microsoft.com/office/drawing/2014/main" id="{881B9055-AE09-572B-C5A9-9EC7CA677B9F}"/>
+                <a16:creationId xmlns:a16="http://schemas.microsoft.com/office/drawing/2014/main" id="{266DB0E8-5549-D2FA-BC5A-FA0D7C5BEE56}"/>
               </a:ext>
             </a:extLst>
           </p:cNvPr>
@@ -941,7 +941,7 @@
           <p:cNvPr id="4" name="日付プレースホルダー 3">
             <a:extLst>
               <a:ext uri="{FF2B5EF4-FFF2-40B4-BE49-F238E27FC236}">
-                <a16:creationId xmlns:a16="http://schemas.microsoft.com/office/drawing/2014/main" id="{35D8E560-8348-3825-6423-08B375A07B2D}"/>
+                <a16:creationId xmlns:a16="http://schemas.microsoft.com/office/drawing/2014/main" id="{4AC3686D-D07B-79D4-3D02-8D03754FA381}"/>
               </a:ext>
             </a:extLst>
           </p:cNvPr>
@@ -957,7 +957,7 @@
           <a:bodyPr/>
           <a:lstStyle/>
           <a:p>
-            <a:fld id="{4C7AE7E6-2345-4D03-82D1-2A1E48CB1601}" type="datetimeFigureOut">
+            <a:fld id="{0353D321-9D72-4F5C-805B-BCC046E366F8}" type="datetimeFigureOut">
               <a:rPr kumimoji="1" lang="ja-JP" altLang="en-US" smtClean="0"/>
               <a:t>2026/7/30</a:t>
             </a:fld>
@@ -970,7 +970,7 @@
           <p:cNvPr id="5" name="フッター プレースホルダー 4">
             <a:extLst>
               <a:ext uri="{FF2B5EF4-FFF2-40B4-BE49-F238E27FC236}">
-                <a16:creationId xmlns:a16="http://schemas.microsoft.com/office/drawing/2014/main" id="{07D319B4-6057-8E71-B609-9CD5B13A47FF}"/>
+                <a16:creationId xmlns:a16="http://schemas.microsoft.com/office/drawing/2014/main" id="{FA1CBE68-777E-C0DF-CB22-4D48D7D899AE}"/>
               </a:ext>
             </a:extLst>
           </p:cNvPr>
@@ -995,7 +995,7 @@
           <p:cNvPr id="6" name="スライド番号プレースホルダー 5">
             <a:extLst>
               <a:ext uri="{FF2B5EF4-FFF2-40B4-BE49-F238E27FC236}">
-                <a16:creationId xmlns:a16="http://schemas.microsoft.com/office/drawing/2014/main" id="{307901B4-1D9A-3D39-A7C6-12FCFBFBFE63}"/>
+                <a16:creationId xmlns:a16="http://schemas.microsoft.com/office/drawing/2014/main" id="{80FF6C58-B141-53B7-0044-C6199D2A5D93}"/>
               </a:ext>
             </a:extLst>
           </p:cNvPr>
@@ -1011,7 +1011,7 @@
           <a:bodyPr/>
           <a:lstStyle/>
           <a:p>
-            <a:fld id="{6FFFD9CB-E791-4D08-B3EF-4C2CC3C433CD}" type="slidenum">
+            <a:fld id="{C940496C-795B-448C-A3CC-3E5AB020109C}" type="slidenum">
               <a:rPr kumimoji="1" lang="ja-JP" altLang="en-US" smtClean="0"/>
               <a:t>‹#›</a:t>
             </a:fld>
@@ -1022,7 +1022,7 @@
     </p:spTree>
     <p:extLst>
       <p:ext uri="{BB962C8B-B14F-4D97-AF65-F5344CB8AC3E}">
-        <p14:creationId xmlns:p14="http://schemas.microsoft.com/office/powerpoint/2010/main" val="2784103961"/>
+        <p14:creationId xmlns:p14="http://schemas.microsoft.com/office/powerpoint/2010/main" val="774542814"/>
       </p:ext>
     </p:extLst>
   </p:cSld>
@@ -1054,7 +1054,7 @@
           <p:cNvPr id="2" name="タイトル 1">
             <a:extLst>
               <a:ext uri="{FF2B5EF4-FFF2-40B4-BE49-F238E27FC236}">
-                <a16:creationId xmlns:a16="http://schemas.microsoft.com/office/drawing/2014/main" id="{82880B11-EDED-2153-092F-E93F939AD5EB}"/>
+                <a16:creationId xmlns:a16="http://schemas.microsoft.com/office/drawing/2014/main" id="{1FC18674-36DF-741D-37EC-4C058C7B24A0}"/>
               </a:ext>
             </a:extLst>
           </p:cNvPr>
@@ -1091,7 +1091,7 @@
           <p:cNvPr id="3" name="テキスト プレースホルダー 2">
             <a:extLst>
               <a:ext uri="{FF2B5EF4-FFF2-40B4-BE49-F238E27FC236}">
-                <a16:creationId xmlns:a16="http://schemas.microsoft.com/office/drawing/2014/main" id="{6B4692AB-A039-542B-3A09-53F3A63AA45C}"/>
+                <a16:creationId xmlns:a16="http://schemas.microsoft.com/office/drawing/2014/main" id="{0FA5932E-CF3E-5696-4D1A-940EC877E04B}"/>
               </a:ext>
             </a:extLst>
           </p:cNvPr>
@@ -1216,7 +1216,7 @@
           <p:cNvPr id="4" name="日付プレースホルダー 3">
             <a:extLst>
               <a:ext uri="{FF2B5EF4-FFF2-40B4-BE49-F238E27FC236}">
-                <a16:creationId xmlns:a16="http://schemas.microsoft.com/office/drawing/2014/main" id="{49426CCD-01FB-C440-B6AD-C276ADB194A2}"/>
+                <a16:creationId xmlns:a16="http://schemas.microsoft.com/office/drawing/2014/main" id="{E9A92EFC-3EA8-5C18-16A1-4F5F8AD794C5}"/>
               </a:ext>
             </a:extLst>
           </p:cNvPr>
@@ -1232,7 +1232,7 @@
           <a:bodyPr/>
           <a:lstStyle/>
           <a:p>
-            <a:fld id="{4C7AE7E6-2345-4D03-82D1-2A1E48CB1601}" type="datetimeFigureOut">
+            <a:fld id="{0353D321-9D72-4F5C-805B-BCC046E366F8}" type="datetimeFigureOut">
               <a:rPr kumimoji="1" lang="ja-JP" altLang="en-US" smtClean="0"/>
               <a:t>2026/7/30</a:t>
             </a:fld>
@@ -1245,7 +1245,7 @@
           <p:cNvPr id="5" name="フッター プレースホルダー 4">
             <a:extLst>
               <a:ext uri="{FF2B5EF4-FFF2-40B4-BE49-F238E27FC236}">
-                <a16:creationId xmlns:a16="http://schemas.microsoft.com/office/drawing/2014/main" id="{49D42F89-93E8-D315-07CB-675157FAAEBD}"/>
+                <a16:creationId xmlns:a16="http://schemas.microsoft.com/office/drawing/2014/main" id="{EA3C6F54-25D1-11D9-8A82-8F4597402BBB}"/>
               </a:ext>
             </a:extLst>
           </p:cNvPr>
@@ -1270,7 +1270,7 @@
           <p:cNvPr id="6" name="スライド番号プレースホルダー 5">
             <a:extLst>
               <a:ext uri="{FF2B5EF4-FFF2-40B4-BE49-F238E27FC236}">
-                <a16:creationId xmlns:a16="http://schemas.microsoft.com/office/drawing/2014/main" id="{E10CBD8F-5652-A766-DA65-79C5B7480192}"/>
+                <a16:creationId xmlns:a16="http://schemas.microsoft.com/office/drawing/2014/main" id="{CB759C5C-D8A0-E327-490D-1E4BD3D375C1}"/>
               </a:ext>
             </a:extLst>
           </p:cNvPr>
@@ -1286,7 +1286,7 @@
           <a:bodyPr/>
           <a:lstStyle/>
           <a:p>
-            <a:fld id="{6FFFD9CB-E791-4D08-B3EF-4C2CC3C433CD}" type="slidenum">
+            <a:fld id="{C940496C-795B-448C-A3CC-3E5AB020109C}" type="slidenum">
               <a:rPr kumimoji="1" lang="ja-JP" altLang="en-US" smtClean="0"/>
               <a:t>‹#›</a:t>
             </a:fld>
@@ -1297,7 +1297,7 @@
     </p:spTree>
     <p:extLst>
       <p:ext uri="{BB962C8B-B14F-4D97-AF65-F5344CB8AC3E}">
-        <p14:creationId xmlns:p14="http://schemas.microsoft.com/office/powerpoint/2010/main" val="1927766828"/>
+        <p14:creationId xmlns:p14="http://schemas.microsoft.com/office/powerpoint/2010/main" val="1856326916"/>
       </p:ext>
     </p:extLst>
   </p:cSld>
@@ -1329,7 +1329,7 @@
           <p:cNvPr id="2" name="タイトル 1">
             <a:extLst>
               <a:ext uri="{FF2B5EF4-FFF2-40B4-BE49-F238E27FC236}">
-                <a16:creationId xmlns:a16="http://schemas.microsoft.com/office/drawing/2014/main" id="{9AC087F9-FAAF-A640-CCEC-ACE515FDF07B}"/>
+                <a16:creationId xmlns:a16="http://schemas.microsoft.com/office/drawing/2014/main" id="{80CCE2FD-994E-339A-11A8-1BD9A3C787E5}"/>
               </a:ext>
             </a:extLst>
           </p:cNvPr>
@@ -1357,7 +1357,7 @@
           <p:cNvPr id="3" name="コンテンツ プレースホルダー 2">
             <a:extLst>
               <a:ext uri="{FF2B5EF4-FFF2-40B4-BE49-F238E27FC236}">
-                <a16:creationId xmlns:a16="http://schemas.microsoft.com/office/drawing/2014/main" id="{4D1CD6BD-37CD-9D52-26B5-6ACDBDA6C5EF}"/>
+                <a16:creationId xmlns:a16="http://schemas.microsoft.com/office/drawing/2014/main" id="{6E6A6EF0-ADE9-A2C9-169E-A3158E3504DA}"/>
               </a:ext>
             </a:extLst>
           </p:cNvPr>
@@ -1451,7 +1451,7 @@
           <p:cNvPr id="4" name="コンテンツ プレースホルダー 3">
             <a:extLst>
               <a:ext uri="{FF2B5EF4-FFF2-40B4-BE49-F238E27FC236}">
-                <a16:creationId xmlns:a16="http://schemas.microsoft.com/office/drawing/2014/main" id="{6A5AC1C3-DCA8-76CC-D8F4-196F2078DFAC}"/>
+                <a16:creationId xmlns:a16="http://schemas.microsoft.com/office/drawing/2014/main" id="{27C6BCC4-E48C-4F5C-A498-9F35DB9EEEE7}"/>
               </a:ext>
             </a:extLst>
           </p:cNvPr>
@@ -1545,7 +1545,7 @@
           <p:cNvPr id="5" name="日付プレースホルダー 4">
             <a:extLst>
               <a:ext uri="{FF2B5EF4-FFF2-40B4-BE49-F238E27FC236}">
-                <a16:creationId xmlns:a16="http://schemas.microsoft.com/office/drawing/2014/main" id="{94C46B4C-FED1-9D32-68CF-C8BA149B8FEC}"/>
+                <a16:creationId xmlns:a16="http://schemas.microsoft.com/office/drawing/2014/main" id="{7108B764-771B-FC4E-0F68-0C0F0406F320}"/>
               </a:ext>
             </a:extLst>
           </p:cNvPr>
@@ -1561,7 +1561,7 @@
           <a:bodyPr/>
           <a:lstStyle/>
           <a:p>
-            <a:fld id="{4C7AE7E6-2345-4D03-82D1-2A1E48CB1601}" type="datetimeFigureOut">
+            <a:fld id="{0353D321-9D72-4F5C-805B-BCC046E366F8}" type="datetimeFigureOut">
               <a:rPr kumimoji="1" lang="ja-JP" altLang="en-US" smtClean="0"/>
               <a:t>2026/7/30</a:t>
             </a:fld>
@@ -1574,7 +1574,7 @@
           <p:cNvPr id="6" name="フッター プレースホルダー 5">
             <a:extLst>
               <a:ext uri="{FF2B5EF4-FFF2-40B4-BE49-F238E27FC236}">
-                <a16:creationId xmlns:a16="http://schemas.microsoft.com/office/drawing/2014/main" id="{76DC158D-1AD4-502A-D263-7BB49D841A8A}"/>
+                <a16:creationId xmlns:a16="http://schemas.microsoft.com/office/drawing/2014/main" id="{9F8D2582-B6D6-A7B5-330B-6F9CEFDC537C}"/>
               </a:ext>
             </a:extLst>
           </p:cNvPr>
@@ -1599,7 +1599,7 @@
           <p:cNvPr id="7" name="スライド番号プレースホルダー 6">
             <a:extLst>
               <a:ext uri="{FF2B5EF4-FFF2-40B4-BE49-F238E27FC236}">
-                <a16:creationId xmlns:a16="http://schemas.microsoft.com/office/drawing/2014/main" id="{49BC0F18-39DA-7E0F-F47A-CC6B5CA4D9C6}"/>
+                <a16:creationId xmlns:a16="http://schemas.microsoft.com/office/drawing/2014/main" id="{1940A071-05BE-0881-ABC9-0281AB9C0A79}"/>
               </a:ext>
             </a:extLst>
           </p:cNvPr>
@@ -1615,7 +1615,7 @@
           <a:bodyPr/>
           <a:lstStyle/>
           <a:p>
-            <a:fld id="{6FFFD9CB-E791-4D08-B3EF-4C2CC3C433CD}" type="slidenum">
+            <a:fld id="{C940496C-795B-448C-A3CC-3E5AB020109C}" type="slidenum">
               <a:rPr kumimoji="1" lang="ja-JP" altLang="en-US" smtClean="0"/>
               <a:t>‹#›</a:t>
             </a:fld>
@@ -1626,7 +1626,7 @@
     </p:spTree>
     <p:extLst>
       <p:ext uri="{BB962C8B-B14F-4D97-AF65-F5344CB8AC3E}">
-        <p14:creationId xmlns:p14="http://schemas.microsoft.com/office/powerpoint/2010/main" val="2915637149"/>
+        <p14:creationId xmlns:p14="http://schemas.microsoft.com/office/powerpoint/2010/main" val="572910716"/>
       </p:ext>
     </p:extLst>
   </p:cSld>
@@ -1658,7 +1658,7 @@
           <p:cNvPr id="2" name="タイトル 1">
             <a:extLst>
               <a:ext uri="{FF2B5EF4-FFF2-40B4-BE49-F238E27FC236}">
-                <a16:creationId xmlns:a16="http://schemas.microsoft.com/office/drawing/2014/main" id="{F7B859F4-AC82-7B56-0167-7CECF45F8D78}"/>
+                <a16:creationId xmlns:a16="http://schemas.microsoft.com/office/drawing/2014/main" id="{3172756A-2D9F-DB49-B5F3-126D1EA2E521}"/>
               </a:ext>
             </a:extLst>
           </p:cNvPr>
@@ -1691,7 +1691,7 @@
           <p:cNvPr id="3" name="テキスト プレースホルダー 2">
             <a:extLst>
               <a:ext uri="{FF2B5EF4-FFF2-40B4-BE49-F238E27FC236}">
-                <a16:creationId xmlns:a16="http://schemas.microsoft.com/office/drawing/2014/main" id="{61BB5A3F-F201-65B8-B6BB-60255AB065F4}"/>
+                <a16:creationId xmlns:a16="http://schemas.microsoft.com/office/drawing/2014/main" id="{25F1550D-27CE-EB9B-167F-E793BF19D9E9}"/>
               </a:ext>
             </a:extLst>
           </p:cNvPr>
@@ -1762,7 +1762,7 @@
           <p:cNvPr id="4" name="コンテンツ プレースホルダー 3">
             <a:extLst>
               <a:ext uri="{FF2B5EF4-FFF2-40B4-BE49-F238E27FC236}">
-                <a16:creationId xmlns:a16="http://schemas.microsoft.com/office/drawing/2014/main" id="{2769171A-4CA3-B7EE-B2B8-4C35E5BFA399}"/>
+                <a16:creationId xmlns:a16="http://schemas.microsoft.com/office/drawing/2014/main" id="{C531888B-F90D-222C-1DCC-0F665AD01C1F}"/>
               </a:ext>
             </a:extLst>
           </p:cNvPr>
@@ -1856,7 +1856,7 @@
           <p:cNvPr id="5" name="テキスト プレースホルダー 4">
             <a:extLst>
               <a:ext uri="{FF2B5EF4-FFF2-40B4-BE49-F238E27FC236}">
-                <a16:creationId xmlns:a16="http://schemas.microsoft.com/office/drawing/2014/main" id="{7F6D2823-0A4A-B0D0-0E0C-56DE5EE1762F}"/>
+                <a16:creationId xmlns:a16="http://schemas.microsoft.com/office/drawing/2014/main" id="{5722199C-0637-49E1-0235-C66EABD2455E}"/>
               </a:ext>
             </a:extLst>
           </p:cNvPr>
@@ -1927,7 +1927,7 @@
           <p:cNvPr id="6" name="コンテンツ プレースホルダー 5">
             <a:extLst>
               <a:ext uri="{FF2B5EF4-FFF2-40B4-BE49-F238E27FC236}">
-                <a16:creationId xmlns:a16="http://schemas.microsoft.com/office/drawing/2014/main" id="{3370E986-9F5E-B34E-FB86-159AFE13ACC3}"/>
+                <a16:creationId xmlns:a16="http://schemas.microsoft.com/office/drawing/2014/main" id="{1B30EB90-464F-4D66-04B4-E119C483E123}"/>
               </a:ext>
             </a:extLst>
           </p:cNvPr>
@@ -2021,7 +2021,7 @@
           <p:cNvPr id="7" name="日付プレースホルダー 6">
             <a:extLst>
               <a:ext uri="{FF2B5EF4-FFF2-40B4-BE49-F238E27FC236}">
-                <a16:creationId xmlns:a16="http://schemas.microsoft.com/office/drawing/2014/main" id="{A455EDAC-8773-6B0C-4FBE-7A4CD312DF49}"/>
+                <a16:creationId xmlns:a16="http://schemas.microsoft.com/office/drawing/2014/main" id="{A95BDB40-8D07-BE4C-D7BD-6BFE37164A9C}"/>
               </a:ext>
             </a:extLst>
           </p:cNvPr>
@@ -2037,7 +2037,7 @@
           <a:bodyPr/>
           <a:lstStyle/>
           <a:p>
-            <a:fld id="{4C7AE7E6-2345-4D03-82D1-2A1E48CB1601}" type="datetimeFigureOut">
+            <a:fld id="{0353D321-9D72-4F5C-805B-BCC046E366F8}" type="datetimeFigureOut">
               <a:rPr kumimoji="1" lang="ja-JP" altLang="en-US" smtClean="0"/>
               <a:t>2026/7/30</a:t>
             </a:fld>
@@ -2050,7 +2050,7 @@
           <p:cNvPr id="8" name="フッター プレースホルダー 7">
             <a:extLst>
               <a:ext uri="{FF2B5EF4-FFF2-40B4-BE49-F238E27FC236}">
-                <a16:creationId xmlns:a16="http://schemas.microsoft.com/office/drawing/2014/main" id="{DB4EDA99-13C8-C3CB-3125-C500F2D2A902}"/>
+                <a16:creationId xmlns:a16="http://schemas.microsoft.com/office/drawing/2014/main" id="{0F09C396-28F3-1EBE-48FF-B6F24F2C33E5}"/>
               </a:ext>
             </a:extLst>
           </p:cNvPr>
@@ -2075,7 +2075,7 @@
           <p:cNvPr id="9" name="スライド番号プレースホルダー 8">
             <a:extLst>
               <a:ext uri="{FF2B5EF4-FFF2-40B4-BE49-F238E27FC236}">
-                <a16:creationId xmlns:a16="http://schemas.microsoft.com/office/drawing/2014/main" id="{5BD2E17A-CCCC-7A31-6A62-50E5DE16F1F4}"/>
+                <a16:creationId xmlns:a16="http://schemas.microsoft.com/office/drawing/2014/main" id="{B8413EAA-DD69-B184-B663-5EA99CFB5D3A}"/>
               </a:ext>
             </a:extLst>
           </p:cNvPr>
@@ -2091,7 +2091,7 @@
           <a:bodyPr/>
           <a:lstStyle/>
           <a:p>
-            <a:fld id="{6FFFD9CB-E791-4D08-B3EF-4C2CC3C433CD}" type="slidenum">
+            <a:fld id="{C940496C-795B-448C-A3CC-3E5AB020109C}" type="slidenum">
               <a:rPr kumimoji="1" lang="ja-JP" altLang="en-US" smtClean="0"/>
               <a:t>‹#›</a:t>
             </a:fld>
@@ -2102,7 +2102,7 @@
     </p:spTree>
     <p:extLst>
       <p:ext uri="{BB962C8B-B14F-4D97-AF65-F5344CB8AC3E}">
-        <p14:creationId xmlns:p14="http://schemas.microsoft.com/office/powerpoint/2010/main" val="357121074"/>
+        <p14:creationId xmlns:p14="http://schemas.microsoft.com/office/powerpoint/2010/main" val="3747212430"/>
       </p:ext>
     </p:extLst>
   </p:cSld>
@@ -2134,7 +2134,7 @@
           <p:cNvPr id="2" name="タイトル 1">
             <a:extLst>
               <a:ext uri="{FF2B5EF4-FFF2-40B4-BE49-F238E27FC236}">
-                <a16:creationId xmlns:a16="http://schemas.microsoft.com/office/drawing/2014/main" id="{BFAE0B6F-7B65-A189-9CD5-60A3B28CDCD0}"/>
+                <a16:creationId xmlns:a16="http://schemas.microsoft.com/office/drawing/2014/main" id="{2701406C-C81B-75D1-323E-F6EFE0DD5509}"/>
               </a:ext>
             </a:extLst>
           </p:cNvPr>
@@ -2162,7 +2162,7 @@
           <p:cNvPr id="3" name="日付プレースホルダー 2">
             <a:extLst>
               <a:ext uri="{FF2B5EF4-FFF2-40B4-BE49-F238E27FC236}">
-                <a16:creationId xmlns:a16="http://schemas.microsoft.com/office/drawing/2014/main" id="{D6DEC38E-57E6-101C-ADB6-A87FB445BD85}"/>
+                <a16:creationId xmlns:a16="http://schemas.microsoft.com/office/drawing/2014/main" id="{552066E5-9A9D-48D1-5DF3-161E82DC1D74}"/>
               </a:ext>
             </a:extLst>
           </p:cNvPr>
@@ -2178,7 +2178,7 @@
           <a:bodyPr/>
           <a:lstStyle/>
           <a:p>
-            <a:fld id="{4C7AE7E6-2345-4D03-82D1-2A1E48CB1601}" type="datetimeFigureOut">
+            <a:fld id="{0353D321-9D72-4F5C-805B-BCC046E366F8}" type="datetimeFigureOut">
               <a:rPr kumimoji="1" lang="ja-JP" altLang="en-US" smtClean="0"/>
               <a:t>2026/7/30</a:t>
             </a:fld>
@@ -2191,7 +2191,7 @@
           <p:cNvPr id="4" name="フッター プレースホルダー 3">
             <a:extLst>
               <a:ext uri="{FF2B5EF4-FFF2-40B4-BE49-F238E27FC236}">
-                <a16:creationId xmlns:a16="http://schemas.microsoft.com/office/drawing/2014/main" id="{18D3F354-DBC1-6DD0-8E15-426B48E5522E}"/>
+                <a16:creationId xmlns:a16="http://schemas.microsoft.com/office/drawing/2014/main" id="{E387B612-6188-CD2D-0184-A03A258E348C}"/>
               </a:ext>
             </a:extLst>
           </p:cNvPr>
@@ -2216,7 +2216,7 @@
           <p:cNvPr id="5" name="スライド番号プレースホルダー 4">
             <a:extLst>
               <a:ext uri="{FF2B5EF4-FFF2-40B4-BE49-F238E27FC236}">
-                <a16:creationId xmlns:a16="http://schemas.microsoft.com/office/drawing/2014/main" id="{E0B3D5C9-7621-7A8E-91F6-6EE9FCD63B88}"/>
+                <a16:creationId xmlns:a16="http://schemas.microsoft.com/office/drawing/2014/main" id="{F5F6F7E4-76B7-45DF-1648-59B011D0A8F3}"/>
               </a:ext>
             </a:extLst>
           </p:cNvPr>
@@ -2232,7 +2232,7 @@
           <a:bodyPr/>
           <a:lstStyle/>
           <a:p>
-            <a:fld id="{6FFFD9CB-E791-4D08-B3EF-4C2CC3C433CD}" type="slidenum">
+            <a:fld id="{C940496C-795B-448C-A3CC-3E5AB020109C}" type="slidenum">
               <a:rPr kumimoji="1" lang="ja-JP" altLang="en-US" smtClean="0"/>
               <a:t>‹#›</a:t>
             </a:fld>
@@ -2243,7 +2243,7 @@
     </p:spTree>
     <p:extLst>
       <p:ext uri="{BB962C8B-B14F-4D97-AF65-F5344CB8AC3E}">
-        <p14:creationId xmlns:p14="http://schemas.microsoft.com/office/powerpoint/2010/main" val="1811469577"/>
+        <p14:creationId xmlns:p14="http://schemas.microsoft.com/office/powerpoint/2010/main" val="1640601165"/>
       </p:ext>
     </p:extLst>
   </p:cSld>
@@ -2275,7 +2275,7 @@
           <p:cNvPr id="2" name="日付プレースホルダー 1">
             <a:extLst>
               <a:ext uri="{FF2B5EF4-FFF2-40B4-BE49-F238E27FC236}">
-                <a16:creationId xmlns:a16="http://schemas.microsoft.com/office/drawing/2014/main" id="{1E4A6BC3-3DBE-6B40-733C-922F216D39FE}"/>
+                <a16:creationId xmlns:a16="http://schemas.microsoft.com/office/drawing/2014/main" id="{CCC41ED7-5670-3776-5C09-61B7A0062BED}"/>
               </a:ext>
             </a:extLst>
           </p:cNvPr>
@@ -2291,7 +2291,7 @@
           <a:bodyPr/>
           <a:lstStyle/>
           <a:p>
-            <a:fld id="{4C7AE7E6-2345-4D03-82D1-2A1E48CB1601}" type="datetimeFigureOut">
+            <a:fld id="{0353D321-9D72-4F5C-805B-BCC046E366F8}" type="datetimeFigureOut">
               <a:rPr kumimoji="1" lang="ja-JP" altLang="en-US" smtClean="0"/>
               <a:t>2026/7/30</a:t>
             </a:fld>
@@ -2304,7 +2304,7 @@
           <p:cNvPr id="3" name="フッター プレースホルダー 2">
             <a:extLst>
               <a:ext uri="{FF2B5EF4-FFF2-40B4-BE49-F238E27FC236}">
-                <a16:creationId xmlns:a16="http://schemas.microsoft.com/office/drawing/2014/main" id="{2329EF70-9DCD-7A26-BB03-37277CB4868D}"/>
+                <a16:creationId xmlns:a16="http://schemas.microsoft.com/office/drawing/2014/main" id="{9A364D1C-7B87-3350-BA4B-48DB392FC2DA}"/>
               </a:ext>
             </a:extLst>
           </p:cNvPr>
@@ -2329,7 +2329,7 @@
           <p:cNvPr id="4" name="スライド番号プレースホルダー 3">
             <a:extLst>
               <a:ext uri="{FF2B5EF4-FFF2-40B4-BE49-F238E27FC236}">
-                <a16:creationId xmlns:a16="http://schemas.microsoft.com/office/drawing/2014/main" id="{E139FB2A-5F39-3CAF-E992-CCED4102F441}"/>
+                <a16:creationId xmlns:a16="http://schemas.microsoft.com/office/drawing/2014/main" id="{6C899933-A8B9-4107-11EE-D6DF421E30E5}"/>
               </a:ext>
             </a:extLst>
           </p:cNvPr>
@@ -2345,7 +2345,7 @@
           <a:bodyPr/>
           <a:lstStyle/>
           <a:p>
-            <a:fld id="{6FFFD9CB-E791-4D08-B3EF-4C2CC3C433CD}" type="slidenum">
+            <a:fld id="{C940496C-795B-448C-A3CC-3E5AB020109C}" type="slidenum">
               <a:rPr kumimoji="1" lang="ja-JP" altLang="en-US" smtClean="0"/>
               <a:t>‹#›</a:t>
             </a:fld>
@@ -2356,7 +2356,7 @@
     </p:spTree>
     <p:extLst>
       <p:ext uri="{BB962C8B-B14F-4D97-AF65-F5344CB8AC3E}">
-        <p14:creationId xmlns:p14="http://schemas.microsoft.com/office/powerpoint/2010/main" val="868339681"/>
+        <p14:creationId xmlns:p14="http://schemas.microsoft.com/office/powerpoint/2010/main" val="1152212601"/>
       </p:ext>
     </p:extLst>
   </p:cSld>
@@ -2388,7 +2388,7 @@
           <p:cNvPr id="2" name="タイトル 1">
             <a:extLst>
               <a:ext uri="{FF2B5EF4-FFF2-40B4-BE49-F238E27FC236}">
-                <a16:creationId xmlns:a16="http://schemas.microsoft.com/office/drawing/2014/main" id="{8AC6E1BE-CBFB-F5FF-6BDA-7B105DB0A1A3}"/>
+                <a16:creationId xmlns:a16="http://schemas.microsoft.com/office/drawing/2014/main" id="{76E4F51D-AA91-64D2-C259-7537FAC8A8A1}"/>
               </a:ext>
             </a:extLst>
           </p:cNvPr>
@@ -2425,7 +2425,7 @@
           <p:cNvPr id="3" name="コンテンツ プレースホルダー 2">
             <a:extLst>
               <a:ext uri="{FF2B5EF4-FFF2-40B4-BE49-F238E27FC236}">
-                <a16:creationId xmlns:a16="http://schemas.microsoft.com/office/drawing/2014/main" id="{4F325FDA-00B2-AB05-368E-E8CC06B8EFE4}"/>
+                <a16:creationId xmlns:a16="http://schemas.microsoft.com/office/drawing/2014/main" id="{5EE93D72-365E-ED6B-583C-B16E2AC998A8}"/>
               </a:ext>
             </a:extLst>
           </p:cNvPr>
@@ -2547,7 +2547,7 @@
           <p:cNvPr id="4" name="テキスト プレースホルダー 3">
             <a:extLst>
               <a:ext uri="{FF2B5EF4-FFF2-40B4-BE49-F238E27FC236}">
-                <a16:creationId xmlns:a16="http://schemas.microsoft.com/office/drawing/2014/main" id="{FCFDEFD3-B1F8-38A6-C981-49CED98B2FD6}"/>
+                <a16:creationId xmlns:a16="http://schemas.microsoft.com/office/drawing/2014/main" id="{A0B7270E-A744-C0D6-D614-0BFBACEF7D4B}"/>
               </a:ext>
             </a:extLst>
           </p:cNvPr>
@@ -2618,7 +2618,7 @@
           <p:cNvPr id="5" name="日付プレースホルダー 4">
             <a:extLst>
               <a:ext uri="{FF2B5EF4-FFF2-40B4-BE49-F238E27FC236}">
-                <a16:creationId xmlns:a16="http://schemas.microsoft.com/office/drawing/2014/main" id="{0F975B6D-C0CF-CB8C-B598-9A34EE3FAA2B}"/>
+                <a16:creationId xmlns:a16="http://schemas.microsoft.com/office/drawing/2014/main" id="{70AB3C56-33AE-E2FF-2C2F-CCBE6DC6C948}"/>
               </a:ext>
             </a:extLst>
           </p:cNvPr>
@@ -2634,7 +2634,7 @@
           <a:bodyPr/>
           <a:lstStyle/>
           <a:p>
-            <a:fld id="{4C7AE7E6-2345-4D03-82D1-2A1E48CB1601}" type="datetimeFigureOut">
+            <a:fld id="{0353D321-9D72-4F5C-805B-BCC046E366F8}" type="datetimeFigureOut">
               <a:rPr kumimoji="1" lang="ja-JP" altLang="en-US" smtClean="0"/>
               <a:t>2026/7/30</a:t>
             </a:fld>
@@ -2647,7 +2647,7 @@
           <p:cNvPr id="6" name="フッター プレースホルダー 5">
             <a:extLst>
               <a:ext uri="{FF2B5EF4-FFF2-40B4-BE49-F238E27FC236}">
-                <a16:creationId xmlns:a16="http://schemas.microsoft.com/office/drawing/2014/main" id="{77F9869B-1352-4085-3C86-F258A2A3C140}"/>
+                <a16:creationId xmlns:a16="http://schemas.microsoft.com/office/drawing/2014/main" id="{80E5EC7E-B3DB-048A-CBC8-471B09112174}"/>
               </a:ext>
             </a:extLst>
           </p:cNvPr>
@@ -2672,7 +2672,7 @@
           <p:cNvPr id="7" name="スライド番号プレースホルダー 6">
             <a:extLst>
               <a:ext uri="{FF2B5EF4-FFF2-40B4-BE49-F238E27FC236}">
-                <a16:creationId xmlns:a16="http://schemas.microsoft.com/office/drawing/2014/main" id="{FA13F6F7-3F2E-EC9C-6E65-438A6A271FE8}"/>
+                <a16:creationId xmlns:a16="http://schemas.microsoft.com/office/drawing/2014/main" id="{ECAAF0AB-87B2-4E67-0CC9-9D6BC24EFA73}"/>
               </a:ext>
             </a:extLst>
           </p:cNvPr>
@@ -2688,7 +2688,7 @@
           <a:bodyPr/>
           <a:lstStyle/>
           <a:p>
-            <a:fld id="{6FFFD9CB-E791-4D08-B3EF-4C2CC3C433CD}" type="slidenum">
+            <a:fld id="{C940496C-795B-448C-A3CC-3E5AB020109C}" type="slidenum">
               <a:rPr kumimoji="1" lang="ja-JP" altLang="en-US" smtClean="0"/>
               <a:t>‹#›</a:t>
             </a:fld>
@@ -2699,7 +2699,7 @@
     </p:spTree>
     <p:extLst>
       <p:ext uri="{BB962C8B-B14F-4D97-AF65-F5344CB8AC3E}">
-        <p14:creationId xmlns:p14="http://schemas.microsoft.com/office/powerpoint/2010/main" val="585728298"/>
+        <p14:creationId xmlns:p14="http://schemas.microsoft.com/office/powerpoint/2010/main" val="597072255"/>
       </p:ext>
     </p:extLst>
   </p:cSld>
@@ -2731,7 +2731,7 @@
           <p:cNvPr id="2" name="タイトル 1">
             <a:extLst>
               <a:ext uri="{FF2B5EF4-FFF2-40B4-BE49-F238E27FC236}">
-                <a16:creationId xmlns:a16="http://schemas.microsoft.com/office/drawing/2014/main" id="{315CE66A-26E9-D765-CD6B-4B7CC9680253}"/>
+                <a16:creationId xmlns:a16="http://schemas.microsoft.com/office/drawing/2014/main" id="{A4586745-4AB1-23CA-41D4-B0A230598836}"/>
               </a:ext>
             </a:extLst>
           </p:cNvPr>
@@ -2768,7 +2768,7 @@
           <p:cNvPr id="3" name="図プレースホルダー 2">
             <a:extLst>
               <a:ext uri="{FF2B5EF4-FFF2-40B4-BE49-F238E27FC236}">
-                <a16:creationId xmlns:a16="http://schemas.microsoft.com/office/drawing/2014/main" id="{F802B1D6-72A4-969E-196C-A63211F5E340}"/>
+                <a16:creationId xmlns:a16="http://schemas.microsoft.com/office/drawing/2014/main" id="{07E35E58-4924-8218-75A3-2054A54FF2BF}"/>
               </a:ext>
             </a:extLst>
           </p:cNvPr>
@@ -2835,7 +2835,7 @@
           <p:cNvPr id="4" name="テキスト プレースホルダー 3">
             <a:extLst>
               <a:ext uri="{FF2B5EF4-FFF2-40B4-BE49-F238E27FC236}">
-                <a16:creationId xmlns:a16="http://schemas.microsoft.com/office/drawing/2014/main" id="{0D6507CF-E4AC-6E7F-4B44-B67A1B906503}"/>
+                <a16:creationId xmlns:a16="http://schemas.microsoft.com/office/drawing/2014/main" id="{B3A24060-5242-1DBE-10FB-04012057FEC8}"/>
               </a:ext>
             </a:extLst>
           </p:cNvPr>
@@ -2906,7 +2906,7 @@
           <p:cNvPr id="5" name="日付プレースホルダー 4">
             <a:extLst>
               <a:ext uri="{FF2B5EF4-FFF2-40B4-BE49-F238E27FC236}">
-                <a16:creationId xmlns:a16="http://schemas.microsoft.com/office/drawing/2014/main" id="{113438A4-14AA-8D1E-0D80-7511ACCD5BA8}"/>
+                <a16:creationId xmlns:a16="http://schemas.microsoft.com/office/drawing/2014/main" id="{242B638D-9DD0-8EAD-3C5D-12D2C721031A}"/>
               </a:ext>
             </a:extLst>
           </p:cNvPr>
@@ -2922,7 +2922,7 @@
           <a:bodyPr/>
           <a:lstStyle/>
           <a:p>
-            <a:fld id="{4C7AE7E6-2345-4D03-82D1-2A1E48CB1601}" type="datetimeFigureOut">
+            <a:fld id="{0353D321-9D72-4F5C-805B-BCC046E366F8}" type="datetimeFigureOut">
               <a:rPr kumimoji="1" lang="ja-JP" altLang="en-US" smtClean="0"/>
               <a:t>2026/7/30</a:t>
             </a:fld>
@@ -2935,7 +2935,7 @@
           <p:cNvPr id="6" name="フッター プレースホルダー 5">
             <a:extLst>
               <a:ext uri="{FF2B5EF4-FFF2-40B4-BE49-F238E27FC236}">
-                <a16:creationId xmlns:a16="http://schemas.microsoft.com/office/drawing/2014/main" id="{FCC39B8A-2325-4100-71AB-C471E4B0AA94}"/>
+                <a16:creationId xmlns:a16="http://schemas.microsoft.com/office/drawing/2014/main" id="{FBAB0C2A-42AC-7D91-B0FC-2E0C2BD7E3B8}"/>
               </a:ext>
             </a:extLst>
           </p:cNvPr>
@@ -2960,7 +2960,7 @@
           <p:cNvPr id="7" name="スライド番号プレースホルダー 6">
             <a:extLst>
               <a:ext uri="{FF2B5EF4-FFF2-40B4-BE49-F238E27FC236}">
-                <a16:creationId xmlns:a16="http://schemas.microsoft.com/office/drawing/2014/main" id="{96CF225D-3F6A-B6DD-A2E7-97A20166EA96}"/>
+                <a16:creationId xmlns:a16="http://schemas.microsoft.com/office/drawing/2014/main" id="{B6AD20A4-A5B9-EFDD-D4CD-6B76F265FBBA}"/>
               </a:ext>
             </a:extLst>
           </p:cNvPr>
@@ -2976,7 +2976,7 @@
           <a:bodyPr/>
           <a:lstStyle/>
           <a:p>
-            <a:fld id="{6FFFD9CB-E791-4D08-B3EF-4C2CC3C433CD}" type="slidenum">
+            <a:fld id="{C940496C-795B-448C-A3CC-3E5AB020109C}" type="slidenum">
               <a:rPr kumimoji="1" lang="ja-JP" altLang="en-US" smtClean="0"/>
               <a:t>‹#›</a:t>
             </a:fld>
@@ -2987,7 +2987,7 @@
     </p:spTree>
     <p:extLst>
       <p:ext uri="{BB962C8B-B14F-4D97-AF65-F5344CB8AC3E}">
-        <p14:creationId xmlns:p14="http://schemas.microsoft.com/office/powerpoint/2010/main" val="3762763528"/>
+        <p14:creationId xmlns:p14="http://schemas.microsoft.com/office/powerpoint/2010/main" val="3580175568"/>
       </p:ext>
     </p:extLst>
   </p:cSld>
@@ -3024,7 +3024,7 @@
           <p:cNvPr id="2" name="タイトル プレースホルダー 1">
             <a:extLst>
               <a:ext uri="{FF2B5EF4-FFF2-40B4-BE49-F238E27FC236}">
-                <a16:creationId xmlns:a16="http://schemas.microsoft.com/office/drawing/2014/main" id="{EF11E8B0-53A7-F23B-3D39-E5AF7B516F39}"/>
+                <a16:creationId xmlns:a16="http://schemas.microsoft.com/office/drawing/2014/main" id="{7219EF6D-3910-BA4F-4C57-767A33F0DD98}"/>
               </a:ext>
             </a:extLst>
           </p:cNvPr>
@@ -3062,7 +3062,7 @@
           <p:cNvPr id="3" name="テキスト プレースホルダー 2">
             <a:extLst>
               <a:ext uri="{FF2B5EF4-FFF2-40B4-BE49-F238E27FC236}">
-                <a16:creationId xmlns:a16="http://schemas.microsoft.com/office/drawing/2014/main" id="{D31D2B91-72B1-9562-FB3D-C43AADB19B6F}"/>
+                <a16:creationId xmlns:a16="http://schemas.microsoft.com/office/drawing/2014/main" id="{0D7FB14F-3128-800B-79B3-68CCA79A7044}"/>
               </a:ext>
             </a:extLst>
           </p:cNvPr>
@@ -3161,7 +3161,7 @@
           <p:cNvPr id="4" name="日付プレースホルダー 3">
             <a:extLst>
               <a:ext uri="{FF2B5EF4-FFF2-40B4-BE49-F238E27FC236}">
-                <a16:creationId xmlns:a16="http://schemas.microsoft.com/office/drawing/2014/main" id="{3FE60E52-00D9-5EE1-8261-5CE24332B512}"/>
+                <a16:creationId xmlns:a16="http://schemas.microsoft.com/office/drawing/2014/main" id="{0ACADC8D-348D-C1FB-0E50-527FF9E054B7}"/>
               </a:ext>
             </a:extLst>
           </p:cNvPr>
@@ -3195,7 +3195,7 @@
             </a:lvl1pPr>
           </a:lstStyle>
           <a:p>
-            <a:fld id="{4C7AE7E6-2345-4D03-82D1-2A1E48CB1601}" type="datetimeFigureOut">
+            <a:fld id="{0353D321-9D72-4F5C-805B-BCC046E366F8}" type="datetimeFigureOut">
               <a:rPr kumimoji="1" lang="ja-JP" altLang="en-US" smtClean="0"/>
               <a:t>2026/7/30</a:t>
             </a:fld>
@@ -3208,7 +3208,7 @@
           <p:cNvPr id="5" name="フッター プレースホルダー 4">
             <a:extLst>
               <a:ext uri="{FF2B5EF4-FFF2-40B4-BE49-F238E27FC236}">
-                <a16:creationId xmlns:a16="http://schemas.microsoft.com/office/drawing/2014/main" id="{223FF984-92B8-E02B-8CA4-264DB0DDE697}"/>
+                <a16:creationId xmlns:a16="http://schemas.microsoft.com/office/drawing/2014/main" id="{C8274E58-4EBD-B295-89B3-5C5AC73DDD6F}"/>
               </a:ext>
             </a:extLst>
           </p:cNvPr>
@@ -3251,7 +3251,7 @@
           <p:cNvPr id="6" name="スライド番号プレースホルダー 5">
             <a:extLst>
               <a:ext uri="{FF2B5EF4-FFF2-40B4-BE49-F238E27FC236}">
-                <a16:creationId xmlns:a16="http://schemas.microsoft.com/office/drawing/2014/main" id="{50F14A8F-8713-D692-4CE0-161F9B123528}"/>
+                <a16:creationId xmlns:a16="http://schemas.microsoft.com/office/drawing/2014/main" id="{6EE947DC-E5F4-2BA6-6FFF-5F4F3040D305}"/>
               </a:ext>
             </a:extLst>
           </p:cNvPr>
@@ -3285,7 +3285,7 @@
             </a:lvl1pPr>
           </a:lstStyle>
           <a:p>
-            <a:fld id="{6FFFD9CB-E791-4D08-B3EF-4C2CC3C433CD}" type="slidenum">
+            <a:fld id="{C940496C-795B-448C-A3CC-3E5AB020109C}" type="slidenum">
               <a:rPr kumimoji="1" lang="ja-JP" altLang="en-US" smtClean="0"/>
               <a:t>‹#›</a:t>
             </a:fld>
@@ -3296,7 +3296,7 @@
     </p:spTree>
     <p:extLst>
       <p:ext uri="{BB962C8B-B14F-4D97-AF65-F5344CB8AC3E}">
-        <p14:creationId xmlns:p14="http://schemas.microsoft.com/office/powerpoint/2010/main" val="4154835868"/>
+        <p14:creationId xmlns:p14="http://schemas.microsoft.com/office/powerpoint/2010/main" val="3956299994"/>
       </p:ext>
     </p:extLst>
   </p:cSld>
@@ -3619,7 +3619,7 @@
           <p:cNvPr id="2" name="テキスト ボックス 1">
             <a:extLst>
               <a:ext uri="{FF2B5EF4-FFF2-40B4-BE49-F238E27FC236}">
-                <a16:creationId xmlns:a16="http://schemas.microsoft.com/office/drawing/2014/main" id="{E18BB0D2-064D-5D65-0A34-0FB22EDB6EDB}"/>
+                <a16:creationId xmlns:a16="http://schemas.microsoft.com/office/drawing/2014/main" id="{694A38ED-56FC-2CA2-6625-3B333FDA82BC}"/>
               </a:ext>
             </a:extLst>
           </p:cNvPr>
@@ -3665,7 +3665,7 @@
           <p:cNvPr id="3" name="テキスト ボックス 2">
             <a:extLst>
               <a:ext uri="{FF2B5EF4-FFF2-40B4-BE49-F238E27FC236}">
-                <a16:creationId xmlns:a16="http://schemas.microsoft.com/office/drawing/2014/main" id="{AA1F7FF8-CFBA-8E27-F84E-85F1A31E2809}"/>
+                <a16:creationId xmlns:a16="http://schemas.microsoft.com/office/drawing/2014/main" id="{8F5D783D-60AC-0AE4-19AD-227C342ED198}"/>
               </a:ext>
             </a:extLst>
           </p:cNvPr>
@@ -3714,7 +3714,7 @@
           <p:cNvPr id="4" name="テキスト ボックス 3">
             <a:extLst>
               <a:ext uri="{FF2B5EF4-FFF2-40B4-BE49-F238E27FC236}">
-                <a16:creationId xmlns:a16="http://schemas.microsoft.com/office/drawing/2014/main" id="{D9A6038E-5A7E-C259-569E-B4FDEF0B05E5}"/>
+                <a16:creationId xmlns:a16="http://schemas.microsoft.com/office/drawing/2014/main" id="{CF9C02BE-6755-A611-F3A5-A4334721C33C}"/>
               </a:ext>
             </a:extLst>
           </p:cNvPr>
@@ -3754,7 +3754,7 @@
           <p:cNvPr id="5" name="テキスト ボックス 4">
             <a:extLst>
               <a:ext uri="{FF2B5EF4-FFF2-40B4-BE49-F238E27FC236}">
-                <a16:creationId xmlns:a16="http://schemas.microsoft.com/office/drawing/2014/main" id="{1CCC5808-E1FD-C1B2-F96D-27ECB8F96C6C}"/>
+                <a16:creationId xmlns:a16="http://schemas.microsoft.com/office/drawing/2014/main" id="{0D976023-F586-8D33-4BA9-ECFF83635DBD}"/>
               </a:ext>
             </a:extLst>
           </p:cNvPr>
@@ -3801,7 +3801,7 @@
             <a:hlinkClick r:id="" action="ppaction://media"/>
             <a:extLst>
               <a:ext uri="{FF2B5EF4-FFF2-40B4-BE49-F238E27FC236}">
-                <a16:creationId xmlns:a16="http://schemas.microsoft.com/office/drawing/2014/main" id="{07726B93-2FC6-F903-BA11-892EEBC32536}"/>
+                <a16:creationId xmlns:a16="http://schemas.microsoft.com/office/drawing/2014/main" id="{6F938625-2C71-375E-426A-ABEE94E2DAA6}"/>
               </a:ext>
             </a:extLst>
           </p:cNvPr>
@@ -3836,7 +3836,7 @@
     </p:spTree>
     <p:extLst>
       <p:ext uri="{BB962C8B-B14F-4D97-AF65-F5344CB8AC3E}">
-        <p14:creationId xmlns:p14="http://schemas.microsoft.com/office/powerpoint/2010/main" val="2869254582"/>
+        <p14:creationId xmlns:p14="http://schemas.microsoft.com/office/powerpoint/2010/main" val="3158924897"/>
       </p:ext>
     </p:extLst>
   </p:cSld>
@@ -3960,7 +3960,7 @@
           <p:cNvPr id="2" name="テキスト ボックス 1">
             <a:extLst>
               <a:ext uri="{FF2B5EF4-FFF2-40B4-BE49-F238E27FC236}">
-                <a16:creationId xmlns:a16="http://schemas.microsoft.com/office/drawing/2014/main" id="{543D2ED9-8562-5121-CFB0-D8DFBF7EE84A}"/>
+                <a16:creationId xmlns:a16="http://schemas.microsoft.com/office/drawing/2014/main" id="{3D29B5F4-D989-C08F-5CEF-FF26F9562C47}"/>
               </a:ext>
             </a:extLst>
           </p:cNvPr>
@@ -4006,7 +4006,7 @@
           <p:cNvPr id="3" name="テキスト ボックス 2">
             <a:extLst>
               <a:ext uri="{FF2B5EF4-FFF2-40B4-BE49-F238E27FC236}">
-                <a16:creationId xmlns:a16="http://schemas.microsoft.com/office/drawing/2014/main" id="{A2A5C0EC-B923-B164-80AB-8DEDAD8C3BD1}"/>
+                <a16:creationId xmlns:a16="http://schemas.microsoft.com/office/drawing/2014/main" id="{DE6401E6-DECF-FC61-720B-0E35F81D154C}"/>
               </a:ext>
             </a:extLst>
           </p:cNvPr>
@@ -4046,7 +4046,7 @@
           <p:cNvPr id="4" name="テキスト ボックス 3">
             <a:extLst>
               <a:ext uri="{FF2B5EF4-FFF2-40B4-BE49-F238E27FC236}">
-                <a16:creationId xmlns:a16="http://schemas.microsoft.com/office/drawing/2014/main" id="{6543F3D7-89AB-CD0D-B806-8E73E13AFBAF}"/>
+                <a16:creationId xmlns:a16="http://schemas.microsoft.com/office/drawing/2014/main" id="{12CFD3A9-97B1-9DF4-22B7-025EC7C0DFD3}"/>
               </a:ext>
             </a:extLst>
           </p:cNvPr>
@@ -4095,7 +4095,7 @@
           <p:cNvPr id="5" name="テキスト ボックス 4">
             <a:extLst>
               <a:ext uri="{FF2B5EF4-FFF2-40B4-BE49-F238E27FC236}">
-                <a16:creationId xmlns:a16="http://schemas.microsoft.com/office/drawing/2014/main" id="{DDEB200F-8944-990C-2AA1-3CD8D1A64F6F}"/>
+                <a16:creationId xmlns:a16="http://schemas.microsoft.com/office/drawing/2014/main" id="{76FCE10A-4DC4-769B-714E-60060ADB6485}"/>
               </a:ext>
             </a:extLst>
           </p:cNvPr>
@@ -4142,7 +4142,7 @@
             <a:hlinkClick r:id="" action="ppaction://media"/>
             <a:extLst>
               <a:ext uri="{FF2B5EF4-FFF2-40B4-BE49-F238E27FC236}">
-                <a16:creationId xmlns:a16="http://schemas.microsoft.com/office/drawing/2014/main" id="{E823116F-EC6B-4B44-BA73-F29BDAA26E53}"/>
+                <a16:creationId xmlns:a16="http://schemas.microsoft.com/office/drawing/2014/main" id="{FEB11E2B-2E05-1602-DE91-B782851C1BF8}"/>
               </a:ext>
             </a:extLst>
           </p:cNvPr>
@@ -4177,7 +4177,7 @@
     </p:spTree>
     <p:extLst>
       <p:ext uri="{BB962C8B-B14F-4D97-AF65-F5344CB8AC3E}">
-        <p14:creationId xmlns:p14="http://schemas.microsoft.com/office/powerpoint/2010/main" val="1129031203"/>
+        <p14:creationId xmlns:p14="http://schemas.microsoft.com/office/powerpoint/2010/main" val="2035067283"/>
       </p:ext>
     </p:extLst>
   </p:cSld>
@@ -4301,7 +4301,7 @@
           <p:cNvPr id="2" name="テキスト ボックス 1">
             <a:extLst>
               <a:ext uri="{FF2B5EF4-FFF2-40B4-BE49-F238E27FC236}">
-                <a16:creationId xmlns:a16="http://schemas.microsoft.com/office/drawing/2014/main" id="{FC112E67-F62D-F598-3980-41BB12BF3202}"/>
+                <a16:creationId xmlns:a16="http://schemas.microsoft.com/office/drawing/2014/main" id="{BDC37100-BF18-F99D-4FD8-9C9C18074146}"/>
               </a:ext>
             </a:extLst>
           </p:cNvPr>
@@ -4347,7 +4347,7 @@
           <p:cNvPr id="3" name="テキスト ボックス 2">
             <a:extLst>
               <a:ext uri="{FF2B5EF4-FFF2-40B4-BE49-F238E27FC236}">
-                <a16:creationId xmlns:a16="http://schemas.microsoft.com/office/drawing/2014/main" id="{E8CA05F0-606C-459C-377B-F06B7F1AC345}"/>
+                <a16:creationId xmlns:a16="http://schemas.microsoft.com/office/drawing/2014/main" id="{29E8BEFF-3F91-8E4E-0F70-0CF983CEF2CF}"/>
               </a:ext>
             </a:extLst>
           </p:cNvPr>
@@ -4387,7 +4387,7 @@
           <p:cNvPr id="4" name="テキスト ボックス 3">
             <a:extLst>
               <a:ext uri="{FF2B5EF4-FFF2-40B4-BE49-F238E27FC236}">
-                <a16:creationId xmlns:a16="http://schemas.microsoft.com/office/drawing/2014/main" id="{D1C58E2B-9BD0-EA85-098F-B6A295F0060A}"/>
+                <a16:creationId xmlns:a16="http://schemas.microsoft.com/office/drawing/2014/main" id="{BDD6A82F-A7D4-C8C7-EAE9-A7B9D1B90F53}"/>
               </a:ext>
             </a:extLst>
           </p:cNvPr>
@@ -4428,7 +4428,7 @@
           <p:cNvPr id="5" name="テキスト ボックス 4">
             <a:extLst>
               <a:ext uri="{FF2B5EF4-FFF2-40B4-BE49-F238E27FC236}">
-                <a16:creationId xmlns:a16="http://schemas.microsoft.com/office/drawing/2014/main" id="{8004D71D-6E39-74B5-9A79-06174AD4FFD6}"/>
+                <a16:creationId xmlns:a16="http://schemas.microsoft.com/office/drawing/2014/main" id="{DD0CC472-4FB8-C2C0-04A5-154342E43FB9}"/>
               </a:ext>
             </a:extLst>
           </p:cNvPr>
@@ -4475,7 +4475,7 @@
             <a:hlinkClick r:id="" action="ppaction://media"/>
             <a:extLst>
               <a:ext uri="{FF2B5EF4-FFF2-40B4-BE49-F238E27FC236}">
-                <a16:creationId xmlns:a16="http://schemas.microsoft.com/office/drawing/2014/main" id="{1A8D600E-69B6-1673-FC80-F5B0BCCB0FEA}"/>
+                <a16:creationId xmlns:a16="http://schemas.microsoft.com/office/drawing/2014/main" id="{9F9053FA-F8C9-4317-89EB-D16E9C58C2A1}"/>
               </a:ext>
             </a:extLst>
           </p:cNvPr>
@@ -4510,7 +4510,7 @@
     </p:spTree>
     <p:extLst>
       <p:ext uri="{BB962C8B-B14F-4D97-AF65-F5344CB8AC3E}">
-        <p14:creationId xmlns:p14="http://schemas.microsoft.com/office/powerpoint/2010/main" val="17513745"/>
+        <p14:creationId xmlns:p14="http://schemas.microsoft.com/office/powerpoint/2010/main" val="3341814667"/>
       </p:ext>
     </p:extLst>
   </p:cSld>
@@ -4634,7 +4634,7 @@
           <p:cNvPr id="2" name="テキスト ボックス 1">
             <a:extLst>
               <a:ext uri="{FF2B5EF4-FFF2-40B4-BE49-F238E27FC236}">
-                <a16:creationId xmlns:a16="http://schemas.microsoft.com/office/drawing/2014/main" id="{70202778-1661-7B31-7FC5-60F21CFD5873}"/>
+                <a16:creationId xmlns:a16="http://schemas.microsoft.com/office/drawing/2014/main" id="{667CE91E-E966-C1D6-20B5-8DDCAA9D8AA1}"/>
               </a:ext>
             </a:extLst>
           </p:cNvPr>
@@ -4680,7 +4680,7 @@
           <p:cNvPr id="3" name="テキスト ボックス 2">
             <a:extLst>
               <a:ext uri="{FF2B5EF4-FFF2-40B4-BE49-F238E27FC236}">
-                <a16:creationId xmlns:a16="http://schemas.microsoft.com/office/drawing/2014/main" id="{5D336F70-31F2-A48D-64B4-967A2A29AE0B}"/>
+                <a16:creationId xmlns:a16="http://schemas.microsoft.com/office/drawing/2014/main" id="{F78E6148-E5DB-C92A-509E-053995A5B16F}"/>
               </a:ext>
             </a:extLst>
           </p:cNvPr>
@@ -4720,7 +4720,7 @@
           <p:cNvPr id="4" name="テキスト ボックス 3">
             <a:extLst>
               <a:ext uri="{FF2B5EF4-FFF2-40B4-BE49-F238E27FC236}">
-                <a16:creationId xmlns:a16="http://schemas.microsoft.com/office/drawing/2014/main" id="{37ADD05F-B05A-F2D8-49D6-288075851237}"/>
+                <a16:creationId xmlns:a16="http://schemas.microsoft.com/office/drawing/2014/main" id="{361D0B57-6AB9-26F5-758F-AA0322A1449D}"/>
               </a:ext>
             </a:extLst>
           </p:cNvPr>
@@ -4779,7 +4779,7 @@
           <p:cNvPr id="5" name="テキスト ボックス 4">
             <a:extLst>
               <a:ext uri="{FF2B5EF4-FFF2-40B4-BE49-F238E27FC236}">
-                <a16:creationId xmlns:a16="http://schemas.microsoft.com/office/drawing/2014/main" id="{7238DF70-45D5-52CE-63FE-CEBE0ECDAB0F}"/>
+                <a16:creationId xmlns:a16="http://schemas.microsoft.com/office/drawing/2014/main" id="{9621CDD7-27F5-D113-9364-BFF66CB24BA5}"/>
               </a:ext>
             </a:extLst>
           </p:cNvPr>
@@ -4826,7 +4826,7 @@
             <a:hlinkClick r:id="" action="ppaction://media"/>
             <a:extLst>
               <a:ext uri="{FF2B5EF4-FFF2-40B4-BE49-F238E27FC236}">
-                <a16:creationId xmlns:a16="http://schemas.microsoft.com/office/drawing/2014/main" id="{43C19BCA-09C4-6AA9-9237-F87C77FAD8F7}"/>
+                <a16:creationId xmlns:a16="http://schemas.microsoft.com/office/drawing/2014/main" id="{2F749B4D-B21D-C3DA-E0C7-C954935903C9}"/>
               </a:ext>
             </a:extLst>
           </p:cNvPr>
@@ -4861,7 +4861,7 @@
     </p:spTree>
     <p:extLst>
       <p:ext uri="{BB962C8B-B14F-4D97-AF65-F5344CB8AC3E}">
-        <p14:creationId xmlns:p14="http://schemas.microsoft.com/office/powerpoint/2010/main" val="402542542"/>
+        <p14:creationId xmlns:p14="http://schemas.microsoft.com/office/powerpoint/2010/main" val="2628244434"/>
       </p:ext>
     </p:extLst>
   </p:cSld>
@@ -4985,7 +4985,7 @@
           <p:cNvPr id="2" name="テキスト ボックス 1">
             <a:extLst>
               <a:ext uri="{FF2B5EF4-FFF2-40B4-BE49-F238E27FC236}">
-                <a16:creationId xmlns:a16="http://schemas.microsoft.com/office/drawing/2014/main" id="{ADD8C381-9F22-B784-98CD-860AC2D1506D}"/>
+                <a16:creationId xmlns:a16="http://schemas.microsoft.com/office/drawing/2014/main" id="{DE068D7B-BFD7-9636-5AD3-25F28686AD13}"/>
               </a:ext>
             </a:extLst>
           </p:cNvPr>
@@ -5031,7 +5031,7 @@
           <p:cNvPr id="3" name="テキスト ボックス 2">
             <a:extLst>
               <a:ext uri="{FF2B5EF4-FFF2-40B4-BE49-F238E27FC236}">
-                <a16:creationId xmlns:a16="http://schemas.microsoft.com/office/drawing/2014/main" id="{17BF50C5-EED2-B982-46E2-4EC271FDC521}"/>
+                <a16:creationId xmlns:a16="http://schemas.microsoft.com/office/drawing/2014/main" id="{F2DC7A46-E800-4587-E8F1-8476E7F3650C}"/>
               </a:ext>
             </a:extLst>
           </p:cNvPr>
@@ -5071,7 +5071,7 @@
           <p:cNvPr id="4" name="テキスト ボックス 3">
             <a:extLst>
               <a:ext uri="{FF2B5EF4-FFF2-40B4-BE49-F238E27FC236}">
-                <a16:creationId xmlns:a16="http://schemas.microsoft.com/office/drawing/2014/main" id="{B818FADE-A029-69AB-EFDE-F6960D20B4B3}"/>
+                <a16:creationId xmlns:a16="http://schemas.microsoft.com/office/drawing/2014/main" id="{7984C265-5622-CB16-E6CE-73B430A9180B}"/>
               </a:ext>
             </a:extLst>
           </p:cNvPr>
@@ -5095,20 +5095,14 @@
           <a:lstStyle/>
           <a:p>
             <a:r>
-              <a:rPr kumimoji="1" lang="en-US" altLang="ja-JP" sz="2000">
+              <a:rPr kumimoji="1" lang="ja-JP" altLang="en-US" sz="2000">
                 <a:solidFill>
                   <a:srgbClr val="333333"/>
                 </a:solidFill>
                 <a:latin typeface="Arial" panose="020B0604020202020204" pitchFamily="34" charset="0"/>
               </a:rPr>
-              <a:t>Initialize repository</a:t>
-            </a:r>
-            <a:endParaRPr kumimoji="1" lang="ja-JP" altLang="en-US" sz="2000">
-              <a:solidFill>
-                <a:srgbClr val="333333"/>
-              </a:solidFill>
-              <a:latin typeface="Arial" panose="020B0604020202020204" pitchFamily="34" charset="0"/>
-            </a:endParaRPr>
+              <a:t>直近のコミットでは、プロジェクトの初期構成と開発基盤が整備されました。</a:t>
+            </a:r>
           </a:p>
         </p:txBody>
       </p:sp>
@@ -5117,7 +5111,7 @@
           <p:cNvPr id="5" name="テキスト ボックス 4">
             <a:extLst>
               <a:ext uri="{FF2B5EF4-FFF2-40B4-BE49-F238E27FC236}">
-                <a16:creationId xmlns:a16="http://schemas.microsoft.com/office/drawing/2014/main" id="{B2B6E7E5-E2A7-FFD7-E200-C1452BCFDEE6}"/>
+                <a16:creationId xmlns:a16="http://schemas.microsoft.com/office/drawing/2014/main" id="{2A3C39F9-CAA6-9DFD-2A04-AE0AE5C61E15}"/>
               </a:ext>
             </a:extLst>
           </p:cNvPr>
@@ -5164,7 +5158,7 @@
             <a:hlinkClick r:id="" action="ppaction://media"/>
             <a:extLst>
               <a:ext uri="{FF2B5EF4-FFF2-40B4-BE49-F238E27FC236}">
-                <a16:creationId xmlns:a16="http://schemas.microsoft.com/office/drawing/2014/main" id="{06B42E42-9A40-5DBA-2D68-DB8909CBEF01}"/>
+                <a16:creationId xmlns:a16="http://schemas.microsoft.com/office/drawing/2014/main" id="{5C4EA7C0-F94B-0D49-E15A-3CDA5E103315}"/>
               </a:ext>
             </a:extLst>
           </p:cNvPr>
@@ -5199,7 +5193,7 @@
     </p:spTree>
     <p:extLst>
       <p:ext uri="{BB962C8B-B14F-4D97-AF65-F5344CB8AC3E}">
-        <p14:creationId xmlns:p14="http://schemas.microsoft.com/office/powerpoint/2010/main" val="3638811388"/>
+        <p14:creationId xmlns:p14="http://schemas.microsoft.com/office/powerpoint/2010/main" val="2521416753"/>
       </p:ext>
     </p:extLst>
   </p:cSld>
@@ -5208,10 +5202,10 @@
   </p:clrMapOvr>
   <mc:AlternateContent xmlns:mc="http://schemas.openxmlformats.org/markup-compatibility/2006">
     <mc:Choice xmlns:p14="http://schemas.microsoft.com/office/powerpoint/2010/main" Requires="p14">
-      <p:transition spd="slow" p14:dur="2000" advTm="6000"/>
+      <p:transition spd="slow" p14:dur="2000" advTm="7000"/>
     </mc:Choice>
     <mc:Fallback>
-      <p:transition spd="slow" advTm="6000"/>
+      <p:transition spd="slow" advTm="7000"/>
     </mc:Fallback>
   </mc:AlternateContent>
   <p:timing>
@@ -5242,7 +5236,7 @@
                                   <p:childTnLst>
                                     <p:cmd type="call" cmd="playFrom(0.0)">
                                       <p:cBhvr>
-                                        <p:cTn id="6" dur="5687" fill="hold"/>
+                                        <p:cTn id="6" dur="6126" fill="hold"/>
                                         <p:tgtEl>
                                           <p:spTgt spid="6"/>
                                         </p:tgtEl>
@@ -5323,7 +5317,7 @@
           <p:cNvPr id="2" name="テキスト ボックス 1">
             <a:extLst>
               <a:ext uri="{FF2B5EF4-FFF2-40B4-BE49-F238E27FC236}">
-                <a16:creationId xmlns:a16="http://schemas.microsoft.com/office/drawing/2014/main" id="{508DC850-4DEB-536D-F3BA-0B9C04E8BD4C}"/>
+                <a16:creationId xmlns:a16="http://schemas.microsoft.com/office/drawing/2014/main" id="{A09391AA-876D-3A1B-0BA7-6CD3EEB7B452}"/>
               </a:ext>
             </a:extLst>
           </p:cNvPr>
@@ -5369,7 +5363,7 @@
           <p:cNvPr id="3" name="テキスト ボックス 2">
             <a:extLst>
               <a:ext uri="{FF2B5EF4-FFF2-40B4-BE49-F238E27FC236}">
-                <a16:creationId xmlns:a16="http://schemas.microsoft.com/office/drawing/2014/main" id="{722DE064-3715-1A45-5A09-4700A6CA0BF7}"/>
+                <a16:creationId xmlns:a16="http://schemas.microsoft.com/office/drawing/2014/main" id="{B278D041-8326-0774-24E2-2783C9A3FBA9}"/>
               </a:ext>
             </a:extLst>
           </p:cNvPr>
@@ -5409,7 +5403,7 @@
           <p:cNvPr id="4" name="テキスト ボックス 3">
             <a:extLst>
               <a:ext uri="{FF2B5EF4-FFF2-40B4-BE49-F238E27FC236}">
-                <a16:creationId xmlns:a16="http://schemas.microsoft.com/office/drawing/2014/main" id="{E3829E16-4DE0-F992-FAB0-5A508F560ACD}"/>
+                <a16:creationId xmlns:a16="http://schemas.microsoft.com/office/drawing/2014/main" id="{3CFA08C4-09EC-1E27-505A-826FB9575CD0}"/>
               </a:ext>
             </a:extLst>
           </p:cNvPr>
@@ -5474,7 +5468,7 @@
           <p:cNvPr id="5" name="テキスト ボックス 4">
             <a:extLst>
               <a:ext uri="{FF2B5EF4-FFF2-40B4-BE49-F238E27FC236}">
-                <a16:creationId xmlns:a16="http://schemas.microsoft.com/office/drawing/2014/main" id="{3A3F1206-8F8D-0541-7AFE-0C3173F1E6F5}"/>
+                <a16:creationId xmlns:a16="http://schemas.microsoft.com/office/drawing/2014/main" id="{EAFC9FFF-16A6-D1BD-9F28-D155BE3EC6F6}"/>
               </a:ext>
             </a:extLst>
           </p:cNvPr>
@@ -5521,7 +5515,7 @@
             <a:hlinkClick r:id="" action="ppaction://media"/>
             <a:extLst>
               <a:ext uri="{FF2B5EF4-FFF2-40B4-BE49-F238E27FC236}">
-                <a16:creationId xmlns:a16="http://schemas.microsoft.com/office/drawing/2014/main" id="{3E980B15-223D-FB51-1C4D-2D455B8DE0FD}"/>
+                <a16:creationId xmlns:a16="http://schemas.microsoft.com/office/drawing/2014/main" id="{BBDF79AA-FBBF-D9F8-2B1A-7C61B1097AD0}"/>
               </a:ext>
             </a:extLst>
           </p:cNvPr>
@@ -5556,7 +5550,7 @@
     </p:spTree>
     <p:extLst>
       <p:ext uri="{BB962C8B-B14F-4D97-AF65-F5344CB8AC3E}">
-        <p14:creationId xmlns:p14="http://schemas.microsoft.com/office/powerpoint/2010/main" val="2481423351"/>
+        <p14:creationId xmlns:p14="http://schemas.microsoft.com/office/powerpoint/2010/main" val="114214027"/>
       </p:ext>
     </p:extLst>
   </p:cSld>
